--- a/AC_COMERCIAL_IMPORTADORA_E_EXP.pptx
+++ b/AC_COMERCIAL_IMPORTADORA_E_EXP.pptx
@@ -11,6 +11,7 @@
     <p:sldId id="259" r:id="rId10"/>
     <p:sldId id="260" r:id="rId11"/>
     <p:sldId id="261" r:id="rId12"/>
+    <p:sldId id="262" r:id="rId13"/>
   </p:sldIdLst>
   <p:sldSz cx="12188952" cy="6858000" type="screen4x3"/>
   <p:notesSz cx="6858000" cy="9144000"/>
@@ -142,13 +143,10 @@
           </c:spPr>
           <c:cat>
             <c:strRef>
-              <c:f>Sheet1!$A$2:$A$3</c:f>
+              <c:f>Sheet1!$A$2:$A$2</c:f>
               <c:strCache>
-                <c:ptCount val="2"/>
+                <c:ptCount val="1"/>
                 <c:pt idx="0">
-                  <c:v>Abril 2026</c:v>
-                </c:pt>
-                <c:pt idx="1">
                   <c:v>Maio 2026</c:v>
                 </c:pt>
               </c:strCache>
@@ -156,15 +154,12 @@
           </c:cat>
           <c:val>
             <c:numRef>
-              <c:f>Sheet1!$B$2:$B$3</c:f>
+              <c:f>Sheet1!$B$2:$B$2</c:f>
               <c:numCache>
                 <c:formatCode>General</c:formatCode>
-                <c:ptCount val="2"/>
+                <c:ptCount val="1"/>
                 <c:pt idx="0">
-                  <c:v>12</c:v>
-                </c:pt>
-                <c:pt idx="1">
-                  <c:v>9</c:v>
+                  <c:v>33</c:v>
                 </c:pt>
               </c:numCache>
             </c:numRef>
@@ -191,13 +186,10 @@
           </c:spPr>
           <c:cat>
             <c:strRef>
-              <c:f>Sheet1!$A$2:$A$3</c:f>
+              <c:f>Sheet1!$A$2:$A$2</c:f>
               <c:strCache>
-                <c:ptCount val="2"/>
+                <c:ptCount val="1"/>
                 <c:pt idx="0">
-                  <c:v>Abril 2026</c:v>
-                </c:pt>
-                <c:pt idx="1">
                   <c:v>Maio 2026</c:v>
                 </c:pt>
               </c:strCache>
@@ -205,15 +197,12 @@
           </c:cat>
           <c:val>
             <c:numRef>
-              <c:f>Sheet1!$C$2:$C$3</c:f>
+              <c:f>Sheet1!$C$2:$C$2</c:f>
               <c:numCache>
                 <c:formatCode>General</c:formatCode>
-                <c:ptCount val="2"/>
+                <c:ptCount val="1"/>
                 <c:pt idx="0">
-                  <c:v>1</c:v>
-                </c:pt>
-                <c:pt idx="1">
-                  <c:v>0</c:v>
+                  <c:v>2</c:v>
                 </c:pt>
               </c:numCache>
             </c:numRef>
@@ -3493,14 +3482,13 @@
           <a:p>
             <a:pPr algn="ctr"/>
             <a:r>
-              <a:rPr sz="1600" b="1">
+              <a:rPr sz="1400" b="1">
                 <a:solidFill>
                   <a:srgbClr val="FFFFFF"/>
                 </a:solidFill>
                 <a:latin typeface="Calibri"/>
               </a:rPr>
-              <a:t>Nossa rota e ir alem das
-entregas!</a:t>
+              <a:t>Nossa rota e ir alem das entregas!</a:t>
             </a:r>
           </a:p>
         </p:txBody>
@@ -3687,7 +3675,7 @@
         <p:spPr>
           <a:xfrm>
             <a:off x="1005840" y="2240279"/>
-            <a:ext cx="2377440" cy="886968"/>
+            <a:ext cx="2377440" cy="868680"/>
           </a:xfrm>
           <a:prstGeom prst="rect">
             <a:avLst/>
@@ -3708,7 +3696,7 @@
                 </a:solidFill>
                 <a:latin typeface="Calibri"/>
               </a:rPr>
-              <a:t>9</a:t>
+              <a:t>35</a:t>
             </a:r>
           </a:p>
         </p:txBody>
@@ -3721,8 +3709,8 @@
         </p:nvSpPr>
         <p:spPr>
           <a:xfrm>
-            <a:off x="1005840" y="3081528"/>
-            <a:ext cx="2377440" cy="502920"/>
+            <a:off x="1005840" y="3090672"/>
+            <a:ext cx="2377440" cy="411480"/>
           </a:xfrm>
           <a:prstGeom prst="rect">
             <a:avLst/>
@@ -3802,7 +3790,7 @@
         <p:spPr>
           <a:xfrm>
             <a:off x="3931920" y="2240279"/>
-            <a:ext cx="2377440" cy="886968"/>
+            <a:ext cx="2377440" cy="868680"/>
           </a:xfrm>
           <a:prstGeom prst="rect">
             <a:avLst/>
@@ -3823,7 +3811,7 @@
                 </a:solidFill>
                 <a:latin typeface="Calibri"/>
               </a:rPr>
-              <a:t>9</a:t>
+              <a:t>33</a:t>
             </a:r>
           </a:p>
         </p:txBody>
@@ -3836,8 +3824,8 @@
         </p:nvSpPr>
         <p:spPr>
           <a:xfrm>
-            <a:off x="3931920" y="3081528"/>
-            <a:ext cx="2377440" cy="502920"/>
+            <a:off x="3931920" y="3090672"/>
+            <a:ext cx="2377440" cy="411480"/>
           </a:xfrm>
           <a:prstGeom prst="rect">
             <a:avLst/>
@@ -3917,7 +3905,7 @@
         <p:spPr>
           <a:xfrm>
             <a:off x="6858000" y="2240279"/>
-            <a:ext cx="2377440" cy="886968"/>
+            <a:ext cx="2377440" cy="868680"/>
           </a:xfrm>
           <a:prstGeom prst="rect">
             <a:avLst/>
@@ -3934,11 +3922,11 @@
             <a:r>
               <a:rPr sz="2800" b="1">
                 <a:solidFill>
-                  <a:srgbClr val="10B981"/>
+                  <a:srgbClr val="EF4444"/>
                 </a:solidFill>
                 <a:latin typeface="Calibri"/>
               </a:rPr>
-              <a:t>0</a:t>
+              <a:t>2</a:t>
             </a:r>
           </a:p>
         </p:txBody>
@@ -3951,8 +3939,8 @@
         </p:nvSpPr>
         <p:spPr>
           <a:xfrm>
-            <a:off x="6858000" y="3081528"/>
-            <a:ext cx="2377440" cy="502920"/>
+            <a:off x="6858000" y="3090672"/>
+            <a:ext cx="2377440" cy="411480"/>
           </a:xfrm>
           <a:prstGeom prst="rect">
             <a:avLst/>
@@ -4032,7 +4020,7 @@
         <p:spPr>
           <a:xfrm>
             <a:off x="9784080" y="2240279"/>
-            <a:ext cx="2377440" cy="886968"/>
+            <a:ext cx="2377440" cy="868680"/>
           </a:xfrm>
           <a:prstGeom prst="rect">
             <a:avLst/>
@@ -4049,11 +4037,11 @@
             <a:r>
               <a:rPr sz="2800" b="1">
                 <a:solidFill>
-                  <a:srgbClr val="10B981"/>
+                  <a:srgbClr val="F59E0B"/>
                 </a:solidFill>
                 <a:latin typeface="Calibri"/>
               </a:rPr>
-              <a:t>100.0%</a:t>
+              <a:t>94.3%</a:t>
             </a:r>
           </a:p>
         </p:txBody>
@@ -4066,8 +4054,8 @@
         </p:nvSpPr>
         <p:spPr>
           <a:xfrm>
-            <a:off x="9784080" y="3081528"/>
-            <a:ext cx="2377440" cy="502920"/>
+            <a:off x="9784080" y="3090672"/>
+            <a:ext cx="2377440" cy="411480"/>
           </a:xfrm>
           <a:prstGeom prst="rect">
             <a:avLst/>
@@ -4248,7 +4236,7 @@
                           </a:solidFill>
                           <a:latin typeface="Calibri"/>
                         </a:rPr>
-                        <a:t>13</a:t>
+                        <a:t>-</a:t>
                       </a:r>
                     </a:p>
                   </a:txBody>
@@ -4271,7 +4259,7 @@
                           </a:solidFill>
                           <a:latin typeface="Calibri"/>
                         </a:rPr>
-                        <a:t>9</a:t>
+                        <a:t>35</a:t>
                       </a:r>
                     </a:p>
                   </a:txBody>
@@ -4294,7 +4282,7 @@
                           </a:solidFill>
                           <a:latin typeface="Calibri"/>
                         </a:rPr>
-                        <a:t>- 4</a:t>
+                        <a:t>-</a:t>
                       </a:r>
                     </a:p>
                   </a:txBody>
@@ -4342,7 +4330,7 @@
                           </a:solidFill>
                           <a:latin typeface="Calibri"/>
                         </a:rPr>
-                        <a:t>12</a:t>
+                        <a:t>-</a:t>
                       </a:r>
                     </a:p>
                   </a:txBody>
@@ -4365,7 +4353,7 @@
                           </a:solidFill>
                           <a:latin typeface="Calibri"/>
                         </a:rPr>
-                        <a:t>9</a:t>
+                        <a:t>33</a:t>
                       </a:r>
                     </a:p>
                   </a:txBody>
@@ -4388,7 +4376,7 @@
                           </a:solidFill>
                           <a:latin typeface="Calibri"/>
                         </a:rPr>
-                        <a:t>- 3</a:t>
+                        <a:t>-</a:t>
                       </a:r>
                     </a:p>
                   </a:txBody>
@@ -4413,7 +4401,7 @@
                           </a:solidFill>
                           <a:latin typeface="Calibri"/>
                         </a:rPr>
-                        <a:t>Fora do Prazo</a:t>
+                        <a:t>Fora Prazo</a:t>
                       </a:r>
                     </a:p>
                   </a:txBody>
@@ -4436,7 +4424,7 @@
                           </a:solidFill>
                           <a:latin typeface="Calibri"/>
                         </a:rPr>
-                        <a:t>1</a:t>
+                        <a:t>-</a:t>
                       </a:r>
                     </a:p>
                   </a:txBody>
@@ -4459,7 +4447,7 @@
                           </a:solidFill>
                           <a:latin typeface="Calibri"/>
                         </a:rPr>
-                        <a:t>0</a:t>
+                        <a:t>2</a:t>
                       </a:r>
                     </a:p>
                   </a:txBody>
@@ -4482,7 +4470,7 @@
                           </a:solidFill>
                           <a:latin typeface="Calibri"/>
                         </a:rPr>
-                        <a:t>- 1</a:t>
+                        <a:t>-</a:t>
                       </a:r>
                     </a:p>
                   </a:txBody>
@@ -4530,7 +4518,7 @@
                           </a:solidFill>
                           <a:latin typeface="Calibri"/>
                         </a:rPr>
-                        <a:t>92.3%</a:t>
+                        <a:t>94.3%</a:t>
                       </a:r>
                     </a:p>
                   </a:txBody>
@@ -4553,7 +4541,7 @@
                           </a:solidFill>
                           <a:latin typeface="Calibri"/>
                         </a:rPr>
-                        <a:t>100.0%</a:t>
+                        <a:t>94.3%</a:t>
                       </a:r>
                     </a:p>
                   </a:txBody>
@@ -4576,7 +4564,7 @@
                           </a:solidFill>
                           <a:latin typeface="Calibri"/>
                         </a:rPr>
-                        <a:t>+ 7.7pp</a:t>
+                        <a:t>+ 0.0pp</a:t>
                       </a:r>
                     </a:p>
                   </a:txBody>
@@ -4747,7 +4735,7 @@
         </p:nvGraphicFramePr>
         <p:xfrm>
           <a:off x="7955279" y="2286000"/>
-          <a:ext cx="4480560" cy="1316736"/>
+          <a:ext cx="4480560" cy="877824"/>
         </p:xfrm>
         <a:graphic>
           <a:graphicData uri="http://schemas.openxmlformats.org/drawingml/2006/table">
@@ -4893,7 +4881,7 @@
                           </a:solidFill>
                           <a:latin typeface="Calibri"/>
                         </a:rPr>
-                        <a:t>Abril 2026</a:t>
+                        <a:t>Maio 2026</a:t>
                       </a:r>
                     </a:p>
                   </a:txBody>
@@ -4916,7 +4904,7 @@
                           </a:solidFill>
                           <a:latin typeface="Calibri"/>
                         </a:rPr>
-                        <a:t>13</a:t>
+                        <a:t>35</a:t>
                       </a:r>
                     </a:p>
                   </a:txBody>
@@ -4939,7 +4927,7 @@
                           </a:solidFill>
                           <a:latin typeface="Calibri"/>
                         </a:rPr>
-                        <a:t>12</a:t>
+                        <a:t>33</a:t>
                       </a:r>
                     </a:p>
                   </a:txBody>
@@ -4962,7 +4950,7 @@
                           </a:solidFill>
                           <a:latin typeface="Calibri"/>
                         </a:rPr>
-                        <a:t>1</a:t>
+                        <a:t>2</a:t>
                       </a:r>
                     </a:p>
                   </a:txBody>
@@ -4985,130 +4973,13 @@
                           </a:solidFill>
                           <a:latin typeface="Calibri"/>
                         </a:rPr>
-                        <a:t>92.3%</a:t>
+                        <a:t>94.3%</a:t>
                       </a:r>
                     </a:p>
                   </a:txBody>
                   <a:tcPr>
                     <a:solidFill>
                       <a:srgbClr val="FFFFFF"/>
-                    </a:solidFill>
-                  </a:tcPr>
-                </a:tc>
-              </a:tr>
-              <a:tr h="438912">
-                <a:tc>
-                  <a:txBody>
-                    <a:bodyPr/>
-                    <a:lstStyle/>
-                    <a:p>
-                      <a:pPr algn="l"/>
-                      <a:r>
-                        <a:rPr sz="1000" b="0">
-                          <a:solidFill>
-                            <a:srgbClr val="1D1B43"/>
-                          </a:solidFill>
-                          <a:latin typeface="Calibri"/>
-                        </a:rPr>
-                        <a:t>Maio 2026</a:t>
-                      </a:r>
-                    </a:p>
-                  </a:txBody>
-                  <a:tcPr>
-                    <a:solidFill>
-                      <a:srgbClr val="F2F2F2"/>
-                    </a:solidFill>
-                  </a:tcPr>
-                </a:tc>
-                <a:tc>
-                  <a:txBody>
-                    <a:bodyPr/>
-                    <a:lstStyle/>
-                    <a:p>
-                      <a:pPr algn="l"/>
-                      <a:r>
-                        <a:rPr sz="1000" b="0">
-                          <a:solidFill>
-                            <a:srgbClr val="1D1B43"/>
-                          </a:solidFill>
-                          <a:latin typeface="Calibri"/>
-                        </a:rPr>
-                        <a:t>9</a:t>
-                      </a:r>
-                    </a:p>
-                  </a:txBody>
-                  <a:tcPr>
-                    <a:solidFill>
-                      <a:srgbClr val="F2F2F2"/>
-                    </a:solidFill>
-                  </a:tcPr>
-                </a:tc>
-                <a:tc>
-                  <a:txBody>
-                    <a:bodyPr/>
-                    <a:lstStyle/>
-                    <a:p>
-                      <a:pPr algn="l"/>
-                      <a:r>
-                        <a:rPr sz="1000" b="0">
-                          <a:solidFill>
-                            <a:srgbClr val="1D1B43"/>
-                          </a:solidFill>
-                          <a:latin typeface="Calibri"/>
-                        </a:rPr>
-                        <a:t>9</a:t>
-                      </a:r>
-                    </a:p>
-                  </a:txBody>
-                  <a:tcPr>
-                    <a:solidFill>
-                      <a:srgbClr val="F2F2F2"/>
-                    </a:solidFill>
-                  </a:tcPr>
-                </a:tc>
-                <a:tc>
-                  <a:txBody>
-                    <a:bodyPr/>
-                    <a:lstStyle/>
-                    <a:p>
-                      <a:pPr algn="l"/>
-                      <a:r>
-                        <a:rPr sz="1000" b="0">
-                          <a:solidFill>
-                            <a:srgbClr val="1D1B43"/>
-                          </a:solidFill>
-                          <a:latin typeface="Calibri"/>
-                        </a:rPr>
-                        <a:t>0</a:t>
-                      </a:r>
-                    </a:p>
-                  </a:txBody>
-                  <a:tcPr>
-                    <a:solidFill>
-                      <a:srgbClr val="F2F2F2"/>
-                    </a:solidFill>
-                  </a:tcPr>
-                </a:tc>
-                <a:tc>
-                  <a:txBody>
-                    <a:bodyPr/>
-                    <a:lstStyle/>
-                    <a:p>
-                      <a:pPr algn="l"/>
-                      <a:r>
-                        <a:rPr sz="1000" b="0">
-                          <a:solidFill>
-                            <a:srgbClr val="1D1B43"/>
-                          </a:solidFill>
-                          <a:latin typeface="Calibri"/>
-                        </a:rPr>
-                        <a:t>100.0%</a:t>
-                      </a:r>
-                    </a:p>
-                  </a:txBody>
-                  <a:tcPr>
-                    <a:solidFill>
-                      <a:srgbClr val="F2F2F2"/>
                     </a:solidFill>
                   </a:tcPr>
                 </a:tc>
@@ -5190,7 +5061,7 @@
                 </a:solidFill>
                 <a:latin typeface="Calibri"/>
               </a:rPr>
-              <a:t>PERFORMANCE: 100.0% - EXCELENTE</a:t>
+              <a:t>PERFORMANCE: 94.3% - REGULAR</a:t>
             </a:r>
           </a:p>
         </p:txBody>
@@ -5254,7 +5125,7 @@
         <p:spPr>
           <a:xfrm>
             <a:off x="749808" y="502920"/>
-            <a:ext cx="9144000" cy="914400"/>
+            <a:ext cx="10058400" cy="914400"/>
           </a:xfrm>
           <a:prstGeom prst="rect">
             <a:avLst/>
@@ -5269,13 +5140,13 @@
           <a:p>
             <a:pPr algn="l"/>
             <a:r>
-              <a:rPr sz="4000" b="1">
+              <a:rPr sz="3200" b="1">
                 <a:solidFill>
                   <a:srgbClr val="F97316"/>
                 </a:solidFill>
                 <a:latin typeface="Calibri"/>
               </a:rPr>
-              <a:t>PERFORMANCE POR UF</a:t>
+              <a:t>OCORRENCIAS FORA DO PRAZO (2)</a:t>
             </a:r>
           </a:p>
         </p:txBody>
@@ -5288,7 +5159,7 @@
         </p:nvSpPr>
         <p:spPr>
           <a:xfrm>
-            <a:off x="749808" y="1719072"/>
+            <a:off x="749808" y="1600200"/>
             <a:ext cx="10424160" cy="36576"/>
           </a:xfrm>
           <a:prstGeom prst="rect">
@@ -5332,8 +5203,8 @@
           <p:nvPr/>
         </p:nvGraphicFramePr>
         <p:xfrm>
-          <a:off x="731520" y="1920240"/>
-          <a:ext cx="10698480" cy="914400"/>
+          <a:off x="457200" y="1828800"/>
+          <a:ext cx="11429999" cy="1152144"/>
         </p:xfrm>
         <a:graphic>
           <a:graphicData uri="http://schemas.openxmlformats.org/drawingml/2006/table">
@@ -5342,14 +5213,13 @@
                 <a:tableStyleId>{5C22544A-7EE6-4342-B048-85BDC9FD1C3A}</a:tableStyleId>
               </a:tblPr>
               <a:tblGrid>
-                <a:gridCol w="1097280"/>
-                <a:gridCol w="1645920"/>
-                <a:gridCol w="1645920"/>
-                <a:gridCol w="1645920"/>
+                <a:gridCol w="1280160"/>
+                <a:gridCol w="3749039"/>
+                <a:gridCol w="2103120"/>
                 <a:gridCol w="1554480"/>
-                <a:gridCol w="3108960"/>
+                <a:gridCol w="2743200"/>
               </a:tblGrid>
-              <a:tr h="457200">
+              <a:tr h="384048">
                 <a:tc>
                   <a:txBody>
                     <a:bodyPr/>
@@ -5363,7 +5233,7 @@
                           </a:solidFill>
                           <a:latin typeface="Calibri"/>
                         </a:rPr>
-                        <a:t>UF</a:t>
+                        <a:t>MD</a:t>
                       </a:r>
                     </a:p>
                   </a:txBody>
@@ -5386,7 +5256,7 @@
                           </a:solidFill>
                           <a:latin typeface="Calibri"/>
                         </a:rPr>
-                        <a:t>TOTAL</a:t>
+                        <a:t>DESTINATARIO</a:t>
                       </a:r>
                     </a:p>
                   </a:txBody>
@@ -5409,7 +5279,7 @@
                           </a:solidFill>
                           <a:latin typeface="Calibri"/>
                         </a:rPr>
-                        <a:t>NO PRAZO</a:t>
+                        <a:t>CIDADE/UF</a:t>
                       </a:r>
                     </a:p>
                   </a:txBody>
@@ -5432,7 +5302,7 @@
                           </a:solidFill>
                           <a:latin typeface="Calibri"/>
                         </a:rPr>
-                        <a:t>FORA</a:t>
+                        <a:t>PREV. ENTREGA</a:t>
                       </a:r>
                     </a:p>
                   </a:txBody>
@@ -5455,7 +5325,7 @@
                           </a:solidFill>
                           <a:latin typeface="Calibri"/>
                         </a:rPr>
-                        <a:t>TAXA</a:t>
+                        <a:t>STATUS</a:t>
                       </a:r>
                     </a:p>
                   </a:txBody>
@@ -5465,45 +5335,22 @@
                     </a:solidFill>
                   </a:tcPr>
                 </a:tc>
-                <a:tc>
-                  <a:txBody>
-                    <a:bodyPr/>
-                    <a:lstStyle/>
-                    <a:p>
-                      <a:pPr algn="ctr"/>
-                      <a:r>
-                        <a:rPr sz="1100" b="1">
-                          <a:solidFill>
-                            <a:srgbClr val="FFFFFF"/>
-                          </a:solidFill>
-                          <a:latin typeface="Calibri"/>
-                        </a:rPr>
-                        <a:t>STATUS</a:t>
-                      </a:r>
-                    </a:p>
-                  </a:txBody>
-                  <a:tcPr>
-                    <a:solidFill>
-                      <a:srgbClr val="1D1B43"/>
-                    </a:solidFill>
-                  </a:tcPr>
-                </a:tc>
               </a:tr>
-              <a:tr h="457200">
-                <a:tc>
-                  <a:txBody>
-                    <a:bodyPr/>
-                    <a:lstStyle/>
-                    <a:p>
-                      <a:pPr algn="l"/>
-                      <a:r>
-                        <a:rPr sz="1000" b="0">
-                          <a:solidFill>
-                            <a:srgbClr val="1D1B43"/>
-                          </a:solidFill>
-                          <a:latin typeface="Calibri"/>
-                        </a:rPr>
-                        <a:t>SP</a:t>
+              <a:tr h="384048">
+                <a:tc>
+                  <a:txBody>
+                    <a:bodyPr/>
+                    <a:lstStyle/>
+                    <a:p>
+                      <a:pPr algn="l"/>
+                      <a:r>
+                        <a:rPr sz="1000" b="0">
+                          <a:solidFill>
+                            <a:srgbClr val="1D1B43"/>
+                          </a:solidFill>
+                          <a:latin typeface="Calibri"/>
+                        </a:rPr>
+                        <a:t>283941</a:t>
                       </a:r>
                     </a:p>
                   </a:txBody>
@@ -5526,7 +5373,7 @@
                           </a:solidFill>
                           <a:latin typeface="Calibri"/>
                         </a:rPr>
-                        <a:t>9</a:t>
+                        <a:t>AMAZON LOGISTICA DO - MANAUS / AM</a:t>
                       </a:r>
                     </a:p>
                   </a:txBody>
@@ -5549,7 +5396,7 @@
                           </a:solidFill>
                           <a:latin typeface="Calibri"/>
                         </a:rPr>
-                        <a:t>9</a:t>
+                        <a:t>MANAUS/AM</a:t>
                       </a:r>
                     </a:p>
                   </a:txBody>
@@ -5572,7 +5419,7 @@
                           </a:solidFill>
                           <a:latin typeface="Calibri"/>
                         </a:rPr>
-                        <a:t>0</a:t>
+                        <a:t>27/05/2026</a:t>
                       </a:r>
                     </a:p>
                   </a:txBody>
@@ -5595,7 +5442,7 @@
                           </a:solidFill>
                           <a:latin typeface="Calibri"/>
                         </a:rPr>
-                        <a:t>100.0%</a:t>
+                        <a:t>FORA DO PRAZO</a:t>
                       </a:r>
                     </a:p>
                   </a:txBody>
@@ -5605,26 +5452,120 @@
                     </a:solidFill>
                   </a:tcPr>
                 </a:tc>
-                <a:tc>
-                  <a:txBody>
-                    <a:bodyPr/>
-                    <a:lstStyle/>
-                    <a:p>
-                      <a:pPr algn="l"/>
-                      <a:r>
-                        <a:rPr sz="1000" b="0">
-                          <a:solidFill>
-                            <a:srgbClr val="1D1B43"/>
-                          </a:solidFill>
-                          <a:latin typeface="Calibri"/>
-                        </a:rPr>
-                        <a:t>Excelente</a:t>
-                      </a:r>
-                    </a:p>
-                  </a:txBody>
-                  <a:tcPr>
-                    <a:solidFill>
-                      <a:srgbClr val="FFFFFF"/>
+              </a:tr>
+              <a:tr h="384048">
+                <a:tc>
+                  <a:txBody>
+                    <a:bodyPr/>
+                    <a:lstStyle/>
+                    <a:p>
+                      <a:pPr algn="l"/>
+                      <a:r>
+                        <a:rPr sz="1000" b="0">
+                          <a:solidFill>
+                            <a:srgbClr val="1D1B43"/>
+                          </a:solidFill>
+                          <a:latin typeface="Calibri"/>
+                        </a:rPr>
+                        <a:t>284115</a:t>
+                      </a:r>
+                    </a:p>
+                  </a:txBody>
+                  <a:tcPr>
+                    <a:solidFill>
+                      <a:srgbClr val="F2F2F2"/>
+                    </a:solidFill>
+                  </a:tcPr>
+                </a:tc>
+                <a:tc>
+                  <a:txBody>
+                    <a:bodyPr/>
+                    <a:lstStyle/>
+                    <a:p>
+                      <a:pPr algn="l"/>
+                      <a:r>
+                        <a:rPr sz="1000" b="0">
+                          <a:solidFill>
+                            <a:srgbClr val="1D1B43"/>
+                          </a:solidFill>
+                          <a:latin typeface="Calibri"/>
+                        </a:rPr>
+                        <a:t>AMAZON LOGISTICA DO - FORTALEZA / CE</a:t>
+                      </a:r>
+                    </a:p>
+                  </a:txBody>
+                  <a:tcPr>
+                    <a:solidFill>
+                      <a:srgbClr val="F2F2F2"/>
+                    </a:solidFill>
+                  </a:tcPr>
+                </a:tc>
+                <a:tc>
+                  <a:txBody>
+                    <a:bodyPr/>
+                    <a:lstStyle/>
+                    <a:p>
+                      <a:pPr algn="l"/>
+                      <a:r>
+                        <a:rPr sz="1000" b="0">
+                          <a:solidFill>
+                            <a:srgbClr val="1D1B43"/>
+                          </a:solidFill>
+                          <a:latin typeface="Calibri"/>
+                        </a:rPr>
+                        <a:t>FORTALEZA/CE</a:t>
+                      </a:r>
+                    </a:p>
+                  </a:txBody>
+                  <a:tcPr>
+                    <a:solidFill>
+                      <a:srgbClr val="F2F2F2"/>
+                    </a:solidFill>
+                  </a:tcPr>
+                </a:tc>
+                <a:tc>
+                  <a:txBody>
+                    <a:bodyPr/>
+                    <a:lstStyle/>
+                    <a:p>
+                      <a:pPr algn="l"/>
+                      <a:r>
+                        <a:rPr sz="1000" b="0">
+                          <a:solidFill>
+                            <a:srgbClr val="1D1B43"/>
+                          </a:solidFill>
+                          <a:latin typeface="Calibri"/>
+                        </a:rPr>
+                        <a:t>27/05/2026</a:t>
+                      </a:r>
+                    </a:p>
+                  </a:txBody>
+                  <a:tcPr>
+                    <a:solidFill>
+                      <a:srgbClr val="F2F2F2"/>
+                    </a:solidFill>
+                  </a:tcPr>
+                </a:tc>
+                <a:tc>
+                  <a:txBody>
+                    <a:bodyPr/>
+                    <a:lstStyle/>
+                    <a:p>
+                      <a:pPr algn="l"/>
+                      <a:r>
+                        <a:rPr sz="1000" b="0">
+                          <a:solidFill>
+                            <a:srgbClr val="1D1B43"/>
+                          </a:solidFill>
+                          <a:latin typeface="Calibri"/>
+                        </a:rPr>
+                        <a:t>ENTREGUE FORA DO PRAZO</a:t>
+                      </a:r>
+                    </a:p>
+                  </a:txBody>
+                  <a:tcPr>
+                    <a:solidFill>
+                      <a:srgbClr val="F2F2F2"/>
                     </a:solidFill>
                   </a:tcPr>
                 </a:tc>
@@ -5692,6 +5633,1564 @@
         <p:spPr>
           <a:xfrm>
             <a:off x="749808" y="502920"/>
+            <a:ext cx="9144000" cy="914400"/>
+          </a:xfrm>
+          <a:prstGeom prst="rect">
+            <a:avLst/>
+          </a:prstGeom>
+          <a:noFill/>
+        </p:spPr>
+        <p:txBody>
+          <a:bodyPr wrap="square">
+            <a:spAutoFit/>
+          </a:bodyPr>
+          <a:lstStyle/>
+          <a:p>
+            <a:pPr algn="l"/>
+            <a:r>
+              <a:rPr sz="4000" b="1">
+                <a:solidFill>
+                  <a:srgbClr val="F97316"/>
+                </a:solidFill>
+                <a:latin typeface="Calibri"/>
+              </a:rPr>
+              <a:t>PERFORMANCE POR UF</a:t>
+            </a:r>
+          </a:p>
+        </p:txBody>
+      </p:sp>
+      <p:sp>
+        <p:nvSpPr>
+          <p:cNvPr id="4" name="Rectangle 3"/>
+          <p:cNvSpPr/>
+          <p:nvPr/>
+        </p:nvSpPr>
+        <p:spPr>
+          <a:xfrm>
+            <a:off x="749808" y="1719072"/>
+            <a:ext cx="10424160" cy="36576"/>
+          </a:xfrm>
+          <a:prstGeom prst="rect">
+            <a:avLst/>
+          </a:prstGeom>
+          <a:solidFill>
+            <a:srgbClr val="F97316"/>
+          </a:solidFill>
+          <a:ln>
+            <a:noFill/>
+          </a:ln>
+        </p:spPr>
+        <p:style>
+          <a:lnRef idx="1">
+            <a:schemeClr val="accent1"/>
+          </a:lnRef>
+          <a:fillRef idx="3">
+            <a:schemeClr val="accent1"/>
+          </a:fillRef>
+          <a:effectRef idx="2">
+            <a:schemeClr val="accent1"/>
+          </a:effectRef>
+          <a:fontRef idx="minor">
+            <a:schemeClr val="lt1"/>
+          </a:fontRef>
+        </p:style>
+        <p:txBody>
+          <a:bodyPr rtlCol="0" anchor="ctr"/>
+          <a:lstStyle/>
+          <a:p>
+            <a:pPr algn="ctr"/>
+          </a:p>
+        </p:txBody>
+      </p:sp>
+      <p:graphicFrame>
+        <p:nvGraphicFramePr>
+          <p:cNvPr id="5" name="Table 4"/>
+          <p:cNvGraphicFramePr>
+            <a:graphicFrameLocks noGrp="1"/>
+          </p:cNvGraphicFramePr>
+          <p:nvPr/>
+        </p:nvGraphicFramePr>
+        <p:xfrm>
+          <a:off x="731520" y="1920240"/>
+          <a:ext cx="10698480" cy="4389120"/>
+        </p:xfrm>
+        <a:graphic>
+          <a:graphicData uri="http://schemas.openxmlformats.org/drawingml/2006/table">
+            <a:tbl>
+              <a:tblPr firstRow="1" bandRow="1">
+                <a:tableStyleId>{5C22544A-7EE6-4342-B048-85BDC9FD1C3A}</a:tableStyleId>
+              </a:tblPr>
+              <a:tblGrid>
+                <a:gridCol w="1097280"/>
+                <a:gridCol w="1645920"/>
+                <a:gridCol w="1645920"/>
+                <a:gridCol w="1645920"/>
+                <a:gridCol w="1554480"/>
+                <a:gridCol w="3108960"/>
+              </a:tblGrid>
+              <a:tr h="438912">
+                <a:tc>
+                  <a:txBody>
+                    <a:bodyPr/>
+                    <a:lstStyle/>
+                    <a:p>
+                      <a:pPr algn="ctr"/>
+                      <a:r>
+                        <a:rPr sz="1100" b="1">
+                          <a:solidFill>
+                            <a:srgbClr val="FFFFFF"/>
+                          </a:solidFill>
+                          <a:latin typeface="Calibri"/>
+                        </a:rPr>
+                        <a:t>UF</a:t>
+                      </a:r>
+                    </a:p>
+                  </a:txBody>
+                  <a:tcPr>
+                    <a:solidFill>
+                      <a:srgbClr val="1D1B43"/>
+                    </a:solidFill>
+                  </a:tcPr>
+                </a:tc>
+                <a:tc>
+                  <a:txBody>
+                    <a:bodyPr/>
+                    <a:lstStyle/>
+                    <a:p>
+                      <a:pPr algn="ctr"/>
+                      <a:r>
+                        <a:rPr sz="1100" b="1">
+                          <a:solidFill>
+                            <a:srgbClr val="FFFFFF"/>
+                          </a:solidFill>
+                          <a:latin typeface="Calibri"/>
+                        </a:rPr>
+                        <a:t>TOTAL</a:t>
+                      </a:r>
+                    </a:p>
+                  </a:txBody>
+                  <a:tcPr>
+                    <a:solidFill>
+                      <a:srgbClr val="1D1B43"/>
+                    </a:solidFill>
+                  </a:tcPr>
+                </a:tc>
+                <a:tc>
+                  <a:txBody>
+                    <a:bodyPr/>
+                    <a:lstStyle/>
+                    <a:p>
+                      <a:pPr algn="ctr"/>
+                      <a:r>
+                        <a:rPr sz="1100" b="1">
+                          <a:solidFill>
+                            <a:srgbClr val="FFFFFF"/>
+                          </a:solidFill>
+                          <a:latin typeface="Calibri"/>
+                        </a:rPr>
+                        <a:t>NO PRAZO</a:t>
+                      </a:r>
+                    </a:p>
+                  </a:txBody>
+                  <a:tcPr>
+                    <a:solidFill>
+                      <a:srgbClr val="1D1B43"/>
+                    </a:solidFill>
+                  </a:tcPr>
+                </a:tc>
+                <a:tc>
+                  <a:txBody>
+                    <a:bodyPr/>
+                    <a:lstStyle/>
+                    <a:p>
+                      <a:pPr algn="ctr"/>
+                      <a:r>
+                        <a:rPr sz="1100" b="1">
+                          <a:solidFill>
+                            <a:srgbClr val="FFFFFF"/>
+                          </a:solidFill>
+                          <a:latin typeface="Calibri"/>
+                        </a:rPr>
+                        <a:t>FORA</a:t>
+                      </a:r>
+                    </a:p>
+                  </a:txBody>
+                  <a:tcPr>
+                    <a:solidFill>
+                      <a:srgbClr val="1D1B43"/>
+                    </a:solidFill>
+                  </a:tcPr>
+                </a:tc>
+                <a:tc>
+                  <a:txBody>
+                    <a:bodyPr/>
+                    <a:lstStyle/>
+                    <a:p>
+                      <a:pPr algn="ctr"/>
+                      <a:r>
+                        <a:rPr sz="1100" b="1">
+                          <a:solidFill>
+                            <a:srgbClr val="FFFFFF"/>
+                          </a:solidFill>
+                          <a:latin typeface="Calibri"/>
+                        </a:rPr>
+                        <a:t>TAXA</a:t>
+                      </a:r>
+                    </a:p>
+                  </a:txBody>
+                  <a:tcPr>
+                    <a:solidFill>
+                      <a:srgbClr val="1D1B43"/>
+                    </a:solidFill>
+                  </a:tcPr>
+                </a:tc>
+                <a:tc>
+                  <a:txBody>
+                    <a:bodyPr/>
+                    <a:lstStyle/>
+                    <a:p>
+                      <a:pPr algn="ctr"/>
+                      <a:r>
+                        <a:rPr sz="1100" b="1">
+                          <a:solidFill>
+                            <a:srgbClr val="FFFFFF"/>
+                          </a:solidFill>
+                          <a:latin typeface="Calibri"/>
+                        </a:rPr>
+                        <a:t>STATUS</a:t>
+                      </a:r>
+                    </a:p>
+                  </a:txBody>
+                  <a:tcPr>
+                    <a:solidFill>
+                      <a:srgbClr val="1D1B43"/>
+                    </a:solidFill>
+                  </a:tcPr>
+                </a:tc>
+              </a:tr>
+              <a:tr h="438912">
+                <a:tc>
+                  <a:txBody>
+                    <a:bodyPr/>
+                    <a:lstStyle/>
+                    <a:p>
+                      <a:pPr algn="l"/>
+                      <a:r>
+                        <a:rPr sz="1000" b="0">
+                          <a:solidFill>
+                            <a:srgbClr val="1D1B43"/>
+                          </a:solidFill>
+                          <a:latin typeface="Calibri"/>
+                        </a:rPr>
+                        <a:t>SP</a:t>
+                      </a:r>
+                    </a:p>
+                  </a:txBody>
+                  <a:tcPr>
+                    <a:solidFill>
+                      <a:srgbClr val="FFFFFF"/>
+                    </a:solidFill>
+                  </a:tcPr>
+                </a:tc>
+                <a:tc>
+                  <a:txBody>
+                    <a:bodyPr/>
+                    <a:lstStyle/>
+                    <a:p>
+                      <a:pPr algn="l"/>
+                      <a:r>
+                        <a:rPr sz="1000" b="0">
+                          <a:solidFill>
+                            <a:srgbClr val="1D1B43"/>
+                          </a:solidFill>
+                          <a:latin typeface="Calibri"/>
+                        </a:rPr>
+                        <a:t>27</a:t>
+                      </a:r>
+                    </a:p>
+                  </a:txBody>
+                  <a:tcPr>
+                    <a:solidFill>
+                      <a:srgbClr val="FFFFFF"/>
+                    </a:solidFill>
+                  </a:tcPr>
+                </a:tc>
+                <a:tc>
+                  <a:txBody>
+                    <a:bodyPr/>
+                    <a:lstStyle/>
+                    <a:p>
+                      <a:pPr algn="l"/>
+                      <a:r>
+                        <a:rPr sz="1000" b="0">
+                          <a:solidFill>
+                            <a:srgbClr val="1D1B43"/>
+                          </a:solidFill>
+                          <a:latin typeface="Calibri"/>
+                        </a:rPr>
+                        <a:t>27</a:t>
+                      </a:r>
+                    </a:p>
+                  </a:txBody>
+                  <a:tcPr>
+                    <a:solidFill>
+                      <a:srgbClr val="FFFFFF"/>
+                    </a:solidFill>
+                  </a:tcPr>
+                </a:tc>
+                <a:tc>
+                  <a:txBody>
+                    <a:bodyPr/>
+                    <a:lstStyle/>
+                    <a:p>
+                      <a:pPr algn="l"/>
+                      <a:r>
+                        <a:rPr sz="1000" b="0">
+                          <a:solidFill>
+                            <a:srgbClr val="1D1B43"/>
+                          </a:solidFill>
+                          <a:latin typeface="Calibri"/>
+                        </a:rPr>
+                        <a:t>0</a:t>
+                      </a:r>
+                    </a:p>
+                  </a:txBody>
+                  <a:tcPr>
+                    <a:solidFill>
+                      <a:srgbClr val="FFFFFF"/>
+                    </a:solidFill>
+                  </a:tcPr>
+                </a:tc>
+                <a:tc>
+                  <a:txBody>
+                    <a:bodyPr/>
+                    <a:lstStyle/>
+                    <a:p>
+                      <a:pPr algn="l"/>
+                      <a:r>
+                        <a:rPr sz="1000" b="0">
+                          <a:solidFill>
+                            <a:srgbClr val="1D1B43"/>
+                          </a:solidFill>
+                          <a:latin typeface="Calibri"/>
+                        </a:rPr>
+                        <a:t>100.0%</a:t>
+                      </a:r>
+                    </a:p>
+                  </a:txBody>
+                  <a:tcPr>
+                    <a:solidFill>
+                      <a:srgbClr val="FFFFFF"/>
+                    </a:solidFill>
+                  </a:tcPr>
+                </a:tc>
+                <a:tc>
+                  <a:txBody>
+                    <a:bodyPr/>
+                    <a:lstStyle/>
+                    <a:p>
+                      <a:pPr algn="l"/>
+                      <a:r>
+                        <a:rPr sz="1000" b="0">
+                          <a:solidFill>
+                            <a:srgbClr val="1D1B43"/>
+                          </a:solidFill>
+                          <a:latin typeface="Calibri"/>
+                        </a:rPr>
+                        <a:t>Excelente</a:t>
+                      </a:r>
+                    </a:p>
+                  </a:txBody>
+                  <a:tcPr>
+                    <a:solidFill>
+                      <a:srgbClr val="FFFFFF"/>
+                    </a:solidFill>
+                  </a:tcPr>
+                </a:tc>
+              </a:tr>
+              <a:tr h="438912">
+                <a:tc>
+                  <a:txBody>
+                    <a:bodyPr/>
+                    <a:lstStyle/>
+                    <a:p>
+                      <a:pPr algn="l"/>
+                      <a:r>
+                        <a:rPr sz="1000" b="0">
+                          <a:solidFill>
+                            <a:srgbClr val="1D1B43"/>
+                          </a:solidFill>
+                          <a:latin typeface="Calibri"/>
+                        </a:rPr>
+                        <a:t>AM</a:t>
+                      </a:r>
+                    </a:p>
+                  </a:txBody>
+                  <a:tcPr>
+                    <a:solidFill>
+                      <a:srgbClr val="F2F2F2"/>
+                    </a:solidFill>
+                  </a:tcPr>
+                </a:tc>
+                <a:tc>
+                  <a:txBody>
+                    <a:bodyPr/>
+                    <a:lstStyle/>
+                    <a:p>
+                      <a:pPr algn="l"/>
+                      <a:r>
+                        <a:rPr sz="1000" b="0">
+                          <a:solidFill>
+                            <a:srgbClr val="1D1B43"/>
+                          </a:solidFill>
+                          <a:latin typeface="Calibri"/>
+                        </a:rPr>
+                        <a:t>1</a:t>
+                      </a:r>
+                    </a:p>
+                  </a:txBody>
+                  <a:tcPr>
+                    <a:solidFill>
+                      <a:srgbClr val="F2F2F2"/>
+                    </a:solidFill>
+                  </a:tcPr>
+                </a:tc>
+                <a:tc>
+                  <a:txBody>
+                    <a:bodyPr/>
+                    <a:lstStyle/>
+                    <a:p>
+                      <a:pPr algn="l"/>
+                      <a:r>
+                        <a:rPr sz="1000" b="0">
+                          <a:solidFill>
+                            <a:srgbClr val="1D1B43"/>
+                          </a:solidFill>
+                          <a:latin typeface="Calibri"/>
+                        </a:rPr>
+                        <a:t>0</a:t>
+                      </a:r>
+                    </a:p>
+                  </a:txBody>
+                  <a:tcPr>
+                    <a:solidFill>
+                      <a:srgbClr val="F2F2F2"/>
+                    </a:solidFill>
+                  </a:tcPr>
+                </a:tc>
+                <a:tc>
+                  <a:txBody>
+                    <a:bodyPr/>
+                    <a:lstStyle/>
+                    <a:p>
+                      <a:pPr algn="l"/>
+                      <a:r>
+                        <a:rPr sz="1000" b="0">
+                          <a:solidFill>
+                            <a:srgbClr val="1D1B43"/>
+                          </a:solidFill>
+                          <a:latin typeface="Calibri"/>
+                        </a:rPr>
+                        <a:t>1</a:t>
+                      </a:r>
+                    </a:p>
+                  </a:txBody>
+                  <a:tcPr>
+                    <a:solidFill>
+                      <a:srgbClr val="F2F2F2"/>
+                    </a:solidFill>
+                  </a:tcPr>
+                </a:tc>
+                <a:tc>
+                  <a:txBody>
+                    <a:bodyPr/>
+                    <a:lstStyle/>
+                    <a:p>
+                      <a:pPr algn="l"/>
+                      <a:r>
+                        <a:rPr sz="1000" b="0">
+                          <a:solidFill>
+                            <a:srgbClr val="1D1B43"/>
+                          </a:solidFill>
+                          <a:latin typeface="Calibri"/>
+                        </a:rPr>
+                        <a:t>0.0%</a:t>
+                      </a:r>
+                    </a:p>
+                  </a:txBody>
+                  <a:tcPr>
+                    <a:solidFill>
+                      <a:srgbClr val="F2F2F2"/>
+                    </a:solidFill>
+                  </a:tcPr>
+                </a:tc>
+                <a:tc>
+                  <a:txBody>
+                    <a:bodyPr/>
+                    <a:lstStyle/>
+                    <a:p>
+                      <a:pPr algn="l"/>
+                      <a:r>
+                        <a:rPr sz="1000" b="0">
+                          <a:solidFill>
+                            <a:srgbClr val="1D1B43"/>
+                          </a:solidFill>
+                          <a:latin typeface="Calibri"/>
+                        </a:rPr>
+                        <a:t>Atencao</a:t>
+                      </a:r>
+                    </a:p>
+                  </a:txBody>
+                  <a:tcPr>
+                    <a:solidFill>
+                      <a:srgbClr val="F2F2F2"/>
+                    </a:solidFill>
+                  </a:tcPr>
+                </a:tc>
+              </a:tr>
+              <a:tr h="438912">
+                <a:tc>
+                  <a:txBody>
+                    <a:bodyPr/>
+                    <a:lstStyle/>
+                    <a:p>
+                      <a:pPr algn="l"/>
+                      <a:r>
+                        <a:rPr sz="1000" b="0">
+                          <a:solidFill>
+                            <a:srgbClr val="1D1B43"/>
+                          </a:solidFill>
+                          <a:latin typeface="Calibri"/>
+                        </a:rPr>
+                        <a:t>BA</a:t>
+                      </a:r>
+                    </a:p>
+                  </a:txBody>
+                  <a:tcPr>
+                    <a:solidFill>
+                      <a:srgbClr val="FFFFFF"/>
+                    </a:solidFill>
+                  </a:tcPr>
+                </a:tc>
+                <a:tc>
+                  <a:txBody>
+                    <a:bodyPr/>
+                    <a:lstStyle/>
+                    <a:p>
+                      <a:pPr algn="l"/>
+                      <a:r>
+                        <a:rPr sz="1000" b="0">
+                          <a:solidFill>
+                            <a:srgbClr val="1D1B43"/>
+                          </a:solidFill>
+                          <a:latin typeface="Calibri"/>
+                        </a:rPr>
+                        <a:t>1</a:t>
+                      </a:r>
+                    </a:p>
+                  </a:txBody>
+                  <a:tcPr>
+                    <a:solidFill>
+                      <a:srgbClr val="FFFFFF"/>
+                    </a:solidFill>
+                  </a:tcPr>
+                </a:tc>
+                <a:tc>
+                  <a:txBody>
+                    <a:bodyPr/>
+                    <a:lstStyle/>
+                    <a:p>
+                      <a:pPr algn="l"/>
+                      <a:r>
+                        <a:rPr sz="1000" b="0">
+                          <a:solidFill>
+                            <a:srgbClr val="1D1B43"/>
+                          </a:solidFill>
+                          <a:latin typeface="Calibri"/>
+                        </a:rPr>
+                        <a:t>1</a:t>
+                      </a:r>
+                    </a:p>
+                  </a:txBody>
+                  <a:tcPr>
+                    <a:solidFill>
+                      <a:srgbClr val="FFFFFF"/>
+                    </a:solidFill>
+                  </a:tcPr>
+                </a:tc>
+                <a:tc>
+                  <a:txBody>
+                    <a:bodyPr/>
+                    <a:lstStyle/>
+                    <a:p>
+                      <a:pPr algn="l"/>
+                      <a:r>
+                        <a:rPr sz="1000" b="0">
+                          <a:solidFill>
+                            <a:srgbClr val="1D1B43"/>
+                          </a:solidFill>
+                          <a:latin typeface="Calibri"/>
+                        </a:rPr>
+                        <a:t>0</a:t>
+                      </a:r>
+                    </a:p>
+                  </a:txBody>
+                  <a:tcPr>
+                    <a:solidFill>
+                      <a:srgbClr val="FFFFFF"/>
+                    </a:solidFill>
+                  </a:tcPr>
+                </a:tc>
+                <a:tc>
+                  <a:txBody>
+                    <a:bodyPr/>
+                    <a:lstStyle/>
+                    <a:p>
+                      <a:pPr algn="l"/>
+                      <a:r>
+                        <a:rPr sz="1000" b="0">
+                          <a:solidFill>
+                            <a:srgbClr val="1D1B43"/>
+                          </a:solidFill>
+                          <a:latin typeface="Calibri"/>
+                        </a:rPr>
+                        <a:t>100.0%</a:t>
+                      </a:r>
+                    </a:p>
+                  </a:txBody>
+                  <a:tcPr>
+                    <a:solidFill>
+                      <a:srgbClr val="FFFFFF"/>
+                    </a:solidFill>
+                  </a:tcPr>
+                </a:tc>
+                <a:tc>
+                  <a:txBody>
+                    <a:bodyPr/>
+                    <a:lstStyle/>
+                    <a:p>
+                      <a:pPr algn="l"/>
+                      <a:r>
+                        <a:rPr sz="1000" b="0">
+                          <a:solidFill>
+                            <a:srgbClr val="1D1B43"/>
+                          </a:solidFill>
+                          <a:latin typeface="Calibri"/>
+                        </a:rPr>
+                        <a:t>Excelente</a:t>
+                      </a:r>
+                    </a:p>
+                  </a:txBody>
+                  <a:tcPr>
+                    <a:solidFill>
+                      <a:srgbClr val="FFFFFF"/>
+                    </a:solidFill>
+                  </a:tcPr>
+                </a:tc>
+              </a:tr>
+              <a:tr h="438912">
+                <a:tc>
+                  <a:txBody>
+                    <a:bodyPr/>
+                    <a:lstStyle/>
+                    <a:p>
+                      <a:pPr algn="l"/>
+                      <a:r>
+                        <a:rPr sz="1000" b="0">
+                          <a:solidFill>
+                            <a:srgbClr val="1D1B43"/>
+                          </a:solidFill>
+                          <a:latin typeface="Calibri"/>
+                        </a:rPr>
+                        <a:t>ES</a:t>
+                      </a:r>
+                    </a:p>
+                  </a:txBody>
+                  <a:tcPr>
+                    <a:solidFill>
+                      <a:srgbClr val="F2F2F2"/>
+                    </a:solidFill>
+                  </a:tcPr>
+                </a:tc>
+                <a:tc>
+                  <a:txBody>
+                    <a:bodyPr/>
+                    <a:lstStyle/>
+                    <a:p>
+                      <a:pPr algn="l"/>
+                      <a:r>
+                        <a:rPr sz="1000" b="0">
+                          <a:solidFill>
+                            <a:srgbClr val="1D1B43"/>
+                          </a:solidFill>
+                          <a:latin typeface="Calibri"/>
+                        </a:rPr>
+                        <a:t>1</a:t>
+                      </a:r>
+                    </a:p>
+                  </a:txBody>
+                  <a:tcPr>
+                    <a:solidFill>
+                      <a:srgbClr val="F2F2F2"/>
+                    </a:solidFill>
+                  </a:tcPr>
+                </a:tc>
+                <a:tc>
+                  <a:txBody>
+                    <a:bodyPr/>
+                    <a:lstStyle/>
+                    <a:p>
+                      <a:pPr algn="l"/>
+                      <a:r>
+                        <a:rPr sz="1000" b="0">
+                          <a:solidFill>
+                            <a:srgbClr val="1D1B43"/>
+                          </a:solidFill>
+                          <a:latin typeface="Calibri"/>
+                        </a:rPr>
+                        <a:t>1</a:t>
+                      </a:r>
+                    </a:p>
+                  </a:txBody>
+                  <a:tcPr>
+                    <a:solidFill>
+                      <a:srgbClr val="F2F2F2"/>
+                    </a:solidFill>
+                  </a:tcPr>
+                </a:tc>
+                <a:tc>
+                  <a:txBody>
+                    <a:bodyPr/>
+                    <a:lstStyle/>
+                    <a:p>
+                      <a:pPr algn="l"/>
+                      <a:r>
+                        <a:rPr sz="1000" b="0">
+                          <a:solidFill>
+                            <a:srgbClr val="1D1B43"/>
+                          </a:solidFill>
+                          <a:latin typeface="Calibri"/>
+                        </a:rPr>
+                        <a:t>0</a:t>
+                      </a:r>
+                    </a:p>
+                  </a:txBody>
+                  <a:tcPr>
+                    <a:solidFill>
+                      <a:srgbClr val="F2F2F2"/>
+                    </a:solidFill>
+                  </a:tcPr>
+                </a:tc>
+                <a:tc>
+                  <a:txBody>
+                    <a:bodyPr/>
+                    <a:lstStyle/>
+                    <a:p>
+                      <a:pPr algn="l"/>
+                      <a:r>
+                        <a:rPr sz="1000" b="0">
+                          <a:solidFill>
+                            <a:srgbClr val="1D1B43"/>
+                          </a:solidFill>
+                          <a:latin typeface="Calibri"/>
+                        </a:rPr>
+                        <a:t>100.0%</a:t>
+                      </a:r>
+                    </a:p>
+                  </a:txBody>
+                  <a:tcPr>
+                    <a:solidFill>
+                      <a:srgbClr val="F2F2F2"/>
+                    </a:solidFill>
+                  </a:tcPr>
+                </a:tc>
+                <a:tc>
+                  <a:txBody>
+                    <a:bodyPr/>
+                    <a:lstStyle/>
+                    <a:p>
+                      <a:pPr algn="l"/>
+                      <a:r>
+                        <a:rPr sz="1000" b="0">
+                          <a:solidFill>
+                            <a:srgbClr val="1D1B43"/>
+                          </a:solidFill>
+                          <a:latin typeface="Calibri"/>
+                        </a:rPr>
+                        <a:t>Excelente</a:t>
+                      </a:r>
+                    </a:p>
+                  </a:txBody>
+                  <a:tcPr>
+                    <a:solidFill>
+                      <a:srgbClr val="F2F2F2"/>
+                    </a:solidFill>
+                  </a:tcPr>
+                </a:tc>
+              </a:tr>
+              <a:tr h="438912">
+                <a:tc>
+                  <a:txBody>
+                    <a:bodyPr/>
+                    <a:lstStyle/>
+                    <a:p>
+                      <a:pPr algn="l"/>
+                      <a:r>
+                        <a:rPr sz="1000" b="0">
+                          <a:solidFill>
+                            <a:srgbClr val="1D1B43"/>
+                          </a:solidFill>
+                          <a:latin typeface="Calibri"/>
+                        </a:rPr>
+                        <a:t>CE</a:t>
+                      </a:r>
+                    </a:p>
+                  </a:txBody>
+                  <a:tcPr>
+                    <a:solidFill>
+                      <a:srgbClr val="FFFFFF"/>
+                    </a:solidFill>
+                  </a:tcPr>
+                </a:tc>
+                <a:tc>
+                  <a:txBody>
+                    <a:bodyPr/>
+                    <a:lstStyle/>
+                    <a:p>
+                      <a:pPr algn="l"/>
+                      <a:r>
+                        <a:rPr sz="1000" b="0">
+                          <a:solidFill>
+                            <a:srgbClr val="1D1B43"/>
+                          </a:solidFill>
+                          <a:latin typeface="Calibri"/>
+                        </a:rPr>
+                        <a:t>1</a:t>
+                      </a:r>
+                    </a:p>
+                  </a:txBody>
+                  <a:tcPr>
+                    <a:solidFill>
+                      <a:srgbClr val="FFFFFF"/>
+                    </a:solidFill>
+                  </a:tcPr>
+                </a:tc>
+                <a:tc>
+                  <a:txBody>
+                    <a:bodyPr/>
+                    <a:lstStyle/>
+                    <a:p>
+                      <a:pPr algn="l"/>
+                      <a:r>
+                        <a:rPr sz="1000" b="0">
+                          <a:solidFill>
+                            <a:srgbClr val="1D1B43"/>
+                          </a:solidFill>
+                          <a:latin typeface="Calibri"/>
+                        </a:rPr>
+                        <a:t>0</a:t>
+                      </a:r>
+                    </a:p>
+                  </a:txBody>
+                  <a:tcPr>
+                    <a:solidFill>
+                      <a:srgbClr val="FFFFFF"/>
+                    </a:solidFill>
+                  </a:tcPr>
+                </a:tc>
+                <a:tc>
+                  <a:txBody>
+                    <a:bodyPr/>
+                    <a:lstStyle/>
+                    <a:p>
+                      <a:pPr algn="l"/>
+                      <a:r>
+                        <a:rPr sz="1000" b="0">
+                          <a:solidFill>
+                            <a:srgbClr val="1D1B43"/>
+                          </a:solidFill>
+                          <a:latin typeface="Calibri"/>
+                        </a:rPr>
+                        <a:t>1</a:t>
+                      </a:r>
+                    </a:p>
+                  </a:txBody>
+                  <a:tcPr>
+                    <a:solidFill>
+                      <a:srgbClr val="FFFFFF"/>
+                    </a:solidFill>
+                  </a:tcPr>
+                </a:tc>
+                <a:tc>
+                  <a:txBody>
+                    <a:bodyPr/>
+                    <a:lstStyle/>
+                    <a:p>
+                      <a:pPr algn="l"/>
+                      <a:r>
+                        <a:rPr sz="1000" b="0">
+                          <a:solidFill>
+                            <a:srgbClr val="1D1B43"/>
+                          </a:solidFill>
+                          <a:latin typeface="Calibri"/>
+                        </a:rPr>
+                        <a:t>0.0%</a:t>
+                      </a:r>
+                    </a:p>
+                  </a:txBody>
+                  <a:tcPr>
+                    <a:solidFill>
+                      <a:srgbClr val="FFFFFF"/>
+                    </a:solidFill>
+                  </a:tcPr>
+                </a:tc>
+                <a:tc>
+                  <a:txBody>
+                    <a:bodyPr/>
+                    <a:lstStyle/>
+                    <a:p>
+                      <a:pPr algn="l"/>
+                      <a:r>
+                        <a:rPr sz="1000" b="0">
+                          <a:solidFill>
+                            <a:srgbClr val="1D1B43"/>
+                          </a:solidFill>
+                          <a:latin typeface="Calibri"/>
+                        </a:rPr>
+                        <a:t>Atencao</a:t>
+                      </a:r>
+                    </a:p>
+                  </a:txBody>
+                  <a:tcPr>
+                    <a:solidFill>
+                      <a:srgbClr val="FFFFFF"/>
+                    </a:solidFill>
+                  </a:tcPr>
+                </a:tc>
+              </a:tr>
+              <a:tr h="438912">
+                <a:tc>
+                  <a:txBody>
+                    <a:bodyPr/>
+                    <a:lstStyle/>
+                    <a:p>
+                      <a:pPr algn="l"/>
+                      <a:r>
+                        <a:rPr sz="1000" b="0">
+                          <a:solidFill>
+                            <a:srgbClr val="1D1B43"/>
+                          </a:solidFill>
+                          <a:latin typeface="Calibri"/>
+                        </a:rPr>
+                        <a:t>PB</a:t>
+                      </a:r>
+                    </a:p>
+                  </a:txBody>
+                  <a:tcPr>
+                    <a:solidFill>
+                      <a:srgbClr val="F2F2F2"/>
+                    </a:solidFill>
+                  </a:tcPr>
+                </a:tc>
+                <a:tc>
+                  <a:txBody>
+                    <a:bodyPr/>
+                    <a:lstStyle/>
+                    <a:p>
+                      <a:pPr algn="l"/>
+                      <a:r>
+                        <a:rPr sz="1000" b="0">
+                          <a:solidFill>
+                            <a:srgbClr val="1D1B43"/>
+                          </a:solidFill>
+                          <a:latin typeface="Calibri"/>
+                        </a:rPr>
+                        <a:t>1</a:t>
+                      </a:r>
+                    </a:p>
+                  </a:txBody>
+                  <a:tcPr>
+                    <a:solidFill>
+                      <a:srgbClr val="F2F2F2"/>
+                    </a:solidFill>
+                  </a:tcPr>
+                </a:tc>
+                <a:tc>
+                  <a:txBody>
+                    <a:bodyPr/>
+                    <a:lstStyle/>
+                    <a:p>
+                      <a:pPr algn="l"/>
+                      <a:r>
+                        <a:rPr sz="1000" b="0">
+                          <a:solidFill>
+                            <a:srgbClr val="1D1B43"/>
+                          </a:solidFill>
+                          <a:latin typeface="Calibri"/>
+                        </a:rPr>
+                        <a:t>1</a:t>
+                      </a:r>
+                    </a:p>
+                  </a:txBody>
+                  <a:tcPr>
+                    <a:solidFill>
+                      <a:srgbClr val="F2F2F2"/>
+                    </a:solidFill>
+                  </a:tcPr>
+                </a:tc>
+                <a:tc>
+                  <a:txBody>
+                    <a:bodyPr/>
+                    <a:lstStyle/>
+                    <a:p>
+                      <a:pPr algn="l"/>
+                      <a:r>
+                        <a:rPr sz="1000" b="0">
+                          <a:solidFill>
+                            <a:srgbClr val="1D1B43"/>
+                          </a:solidFill>
+                          <a:latin typeface="Calibri"/>
+                        </a:rPr>
+                        <a:t>0</a:t>
+                      </a:r>
+                    </a:p>
+                  </a:txBody>
+                  <a:tcPr>
+                    <a:solidFill>
+                      <a:srgbClr val="F2F2F2"/>
+                    </a:solidFill>
+                  </a:tcPr>
+                </a:tc>
+                <a:tc>
+                  <a:txBody>
+                    <a:bodyPr/>
+                    <a:lstStyle/>
+                    <a:p>
+                      <a:pPr algn="l"/>
+                      <a:r>
+                        <a:rPr sz="1000" b="0">
+                          <a:solidFill>
+                            <a:srgbClr val="1D1B43"/>
+                          </a:solidFill>
+                          <a:latin typeface="Calibri"/>
+                        </a:rPr>
+                        <a:t>100.0%</a:t>
+                      </a:r>
+                    </a:p>
+                  </a:txBody>
+                  <a:tcPr>
+                    <a:solidFill>
+                      <a:srgbClr val="F2F2F2"/>
+                    </a:solidFill>
+                  </a:tcPr>
+                </a:tc>
+                <a:tc>
+                  <a:txBody>
+                    <a:bodyPr/>
+                    <a:lstStyle/>
+                    <a:p>
+                      <a:pPr algn="l"/>
+                      <a:r>
+                        <a:rPr sz="1000" b="0">
+                          <a:solidFill>
+                            <a:srgbClr val="1D1B43"/>
+                          </a:solidFill>
+                          <a:latin typeface="Calibri"/>
+                        </a:rPr>
+                        <a:t>Excelente</a:t>
+                      </a:r>
+                    </a:p>
+                  </a:txBody>
+                  <a:tcPr>
+                    <a:solidFill>
+                      <a:srgbClr val="F2F2F2"/>
+                    </a:solidFill>
+                  </a:tcPr>
+                </a:tc>
+              </a:tr>
+              <a:tr h="438912">
+                <a:tc>
+                  <a:txBody>
+                    <a:bodyPr/>
+                    <a:lstStyle/>
+                    <a:p>
+                      <a:pPr algn="l"/>
+                      <a:r>
+                        <a:rPr sz="1000" b="0">
+                          <a:solidFill>
+                            <a:srgbClr val="1D1B43"/>
+                          </a:solidFill>
+                          <a:latin typeface="Calibri"/>
+                        </a:rPr>
+                        <a:t>PE</a:t>
+                      </a:r>
+                    </a:p>
+                  </a:txBody>
+                  <a:tcPr>
+                    <a:solidFill>
+                      <a:srgbClr val="FFFFFF"/>
+                    </a:solidFill>
+                  </a:tcPr>
+                </a:tc>
+                <a:tc>
+                  <a:txBody>
+                    <a:bodyPr/>
+                    <a:lstStyle/>
+                    <a:p>
+                      <a:pPr algn="l"/>
+                      <a:r>
+                        <a:rPr sz="1000" b="0">
+                          <a:solidFill>
+                            <a:srgbClr val="1D1B43"/>
+                          </a:solidFill>
+                          <a:latin typeface="Calibri"/>
+                        </a:rPr>
+                        <a:t>1</a:t>
+                      </a:r>
+                    </a:p>
+                  </a:txBody>
+                  <a:tcPr>
+                    <a:solidFill>
+                      <a:srgbClr val="FFFFFF"/>
+                    </a:solidFill>
+                  </a:tcPr>
+                </a:tc>
+                <a:tc>
+                  <a:txBody>
+                    <a:bodyPr/>
+                    <a:lstStyle/>
+                    <a:p>
+                      <a:pPr algn="l"/>
+                      <a:r>
+                        <a:rPr sz="1000" b="0">
+                          <a:solidFill>
+                            <a:srgbClr val="1D1B43"/>
+                          </a:solidFill>
+                          <a:latin typeface="Calibri"/>
+                        </a:rPr>
+                        <a:t>1</a:t>
+                      </a:r>
+                    </a:p>
+                  </a:txBody>
+                  <a:tcPr>
+                    <a:solidFill>
+                      <a:srgbClr val="FFFFFF"/>
+                    </a:solidFill>
+                  </a:tcPr>
+                </a:tc>
+                <a:tc>
+                  <a:txBody>
+                    <a:bodyPr/>
+                    <a:lstStyle/>
+                    <a:p>
+                      <a:pPr algn="l"/>
+                      <a:r>
+                        <a:rPr sz="1000" b="0">
+                          <a:solidFill>
+                            <a:srgbClr val="1D1B43"/>
+                          </a:solidFill>
+                          <a:latin typeface="Calibri"/>
+                        </a:rPr>
+                        <a:t>0</a:t>
+                      </a:r>
+                    </a:p>
+                  </a:txBody>
+                  <a:tcPr>
+                    <a:solidFill>
+                      <a:srgbClr val="FFFFFF"/>
+                    </a:solidFill>
+                  </a:tcPr>
+                </a:tc>
+                <a:tc>
+                  <a:txBody>
+                    <a:bodyPr/>
+                    <a:lstStyle/>
+                    <a:p>
+                      <a:pPr algn="l"/>
+                      <a:r>
+                        <a:rPr sz="1000" b="0">
+                          <a:solidFill>
+                            <a:srgbClr val="1D1B43"/>
+                          </a:solidFill>
+                          <a:latin typeface="Calibri"/>
+                        </a:rPr>
+                        <a:t>100.0%</a:t>
+                      </a:r>
+                    </a:p>
+                  </a:txBody>
+                  <a:tcPr>
+                    <a:solidFill>
+                      <a:srgbClr val="FFFFFF"/>
+                    </a:solidFill>
+                  </a:tcPr>
+                </a:tc>
+                <a:tc>
+                  <a:txBody>
+                    <a:bodyPr/>
+                    <a:lstStyle/>
+                    <a:p>
+                      <a:pPr algn="l"/>
+                      <a:r>
+                        <a:rPr sz="1000" b="0">
+                          <a:solidFill>
+                            <a:srgbClr val="1D1B43"/>
+                          </a:solidFill>
+                          <a:latin typeface="Calibri"/>
+                        </a:rPr>
+                        <a:t>Excelente</a:t>
+                      </a:r>
+                    </a:p>
+                  </a:txBody>
+                  <a:tcPr>
+                    <a:solidFill>
+                      <a:srgbClr val="FFFFFF"/>
+                    </a:solidFill>
+                  </a:tcPr>
+                </a:tc>
+              </a:tr>
+              <a:tr h="438912">
+                <a:tc>
+                  <a:txBody>
+                    <a:bodyPr/>
+                    <a:lstStyle/>
+                    <a:p>
+                      <a:pPr algn="l"/>
+                      <a:r>
+                        <a:rPr sz="1000" b="0">
+                          <a:solidFill>
+                            <a:srgbClr val="1D1B43"/>
+                          </a:solidFill>
+                          <a:latin typeface="Calibri"/>
+                        </a:rPr>
+                        <a:t>PR</a:t>
+                      </a:r>
+                    </a:p>
+                  </a:txBody>
+                  <a:tcPr>
+                    <a:solidFill>
+                      <a:srgbClr val="F2F2F2"/>
+                    </a:solidFill>
+                  </a:tcPr>
+                </a:tc>
+                <a:tc>
+                  <a:txBody>
+                    <a:bodyPr/>
+                    <a:lstStyle/>
+                    <a:p>
+                      <a:pPr algn="l"/>
+                      <a:r>
+                        <a:rPr sz="1000" b="0">
+                          <a:solidFill>
+                            <a:srgbClr val="1D1B43"/>
+                          </a:solidFill>
+                          <a:latin typeface="Calibri"/>
+                        </a:rPr>
+                        <a:t>1</a:t>
+                      </a:r>
+                    </a:p>
+                  </a:txBody>
+                  <a:tcPr>
+                    <a:solidFill>
+                      <a:srgbClr val="F2F2F2"/>
+                    </a:solidFill>
+                  </a:tcPr>
+                </a:tc>
+                <a:tc>
+                  <a:txBody>
+                    <a:bodyPr/>
+                    <a:lstStyle/>
+                    <a:p>
+                      <a:pPr algn="l"/>
+                      <a:r>
+                        <a:rPr sz="1000" b="0">
+                          <a:solidFill>
+                            <a:srgbClr val="1D1B43"/>
+                          </a:solidFill>
+                          <a:latin typeface="Calibri"/>
+                        </a:rPr>
+                        <a:t>1</a:t>
+                      </a:r>
+                    </a:p>
+                  </a:txBody>
+                  <a:tcPr>
+                    <a:solidFill>
+                      <a:srgbClr val="F2F2F2"/>
+                    </a:solidFill>
+                  </a:tcPr>
+                </a:tc>
+                <a:tc>
+                  <a:txBody>
+                    <a:bodyPr/>
+                    <a:lstStyle/>
+                    <a:p>
+                      <a:pPr algn="l"/>
+                      <a:r>
+                        <a:rPr sz="1000" b="0">
+                          <a:solidFill>
+                            <a:srgbClr val="1D1B43"/>
+                          </a:solidFill>
+                          <a:latin typeface="Calibri"/>
+                        </a:rPr>
+                        <a:t>0</a:t>
+                      </a:r>
+                    </a:p>
+                  </a:txBody>
+                  <a:tcPr>
+                    <a:solidFill>
+                      <a:srgbClr val="F2F2F2"/>
+                    </a:solidFill>
+                  </a:tcPr>
+                </a:tc>
+                <a:tc>
+                  <a:txBody>
+                    <a:bodyPr/>
+                    <a:lstStyle/>
+                    <a:p>
+                      <a:pPr algn="l"/>
+                      <a:r>
+                        <a:rPr sz="1000" b="0">
+                          <a:solidFill>
+                            <a:srgbClr val="1D1B43"/>
+                          </a:solidFill>
+                          <a:latin typeface="Calibri"/>
+                        </a:rPr>
+                        <a:t>100.0%</a:t>
+                      </a:r>
+                    </a:p>
+                  </a:txBody>
+                  <a:tcPr>
+                    <a:solidFill>
+                      <a:srgbClr val="F2F2F2"/>
+                    </a:solidFill>
+                  </a:tcPr>
+                </a:tc>
+                <a:tc>
+                  <a:txBody>
+                    <a:bodyPr/>
+                    <a:lstStyle/>
+                    <a:p>
+                      <a:pPr algn="l"/>
+                      <a:r>
+                        <a:rPr sz="1000" b="0">
+                          <a:solidFill>
+                            <a:srgbClr val="1D1B43"/>
+                          </a:solidFill>
+                          <a:latin typeface="Calibri"/>
+                        </a:rPr>
+                        <a:t>Excelente</a:t>
+                      </a:r>
+                    </a:p>
+                  </a:txBody>
+                  <a:tcPr>
+                    <a:solidFill>
+                      <a:srgbClr val="F2F2F2"/>
+                    </a:solidFill>
+                  </a:tcPr>
+                </a:tc>
+              </a:tr>
+              <a:tr h="438912">
+                <a:tc>
+                  <a:txBody>
+                    <a:bodyPr/>
+                    <a:lstStyle/>
+                    <a:p>
+                      <a:pPr algn="l"/>
+                      <a:r>
+                        <a:rPr sz="1000" b="0">
+                          <a:solidFill>
+                            <a:srgbClr val="1D1B43"/>
+                          </a:solidFill>
+                          <a:latin typeface="Calibri"/>
+                        </a:rPr>
+                        <a:t>RS</a:t>
+                      </a:r>
+                    </a:p>
+                  </a:txBody>
+                  <a:tcPr>
+                    <a:solidFill>
+                      <a:srgbClr val="FFFFFF"/>
+                    </a:solidFill>
+                  </a:tcPr>
+                </a:tc>
+                <a:tc>
+                  <a:txBody>
+                    <a:bodyPr/>
+                    <a:lstStyle/>
+                    <a:p>
+                      <a:pPr algn="l"/>
+                      <a:r>
+                        <a:rPr sz="1000" b="0">
+                          <a:solidFill>
+                            <a:srgbClr val="1D1B43"/>
+                          </a:solidFill>
+                          <a:latin typeface="Calibri"/>
+                        </a:rPr>
+                        <a:t>1</a:t>
+                      </a:r>
+                    </a:p>
+                  </a:txBody>
+                  <a:tcPr>
+                    <a:solidFill>
+                      <a:srgbClr val="FFFFFF"/>
+                    </a:solidFill>
+                  </a:tcPr>
+                </a:tc>
+                <a:tc>
+                  <a:txBody>
+                    <a:bodyPr/>
+                    <a:lstStyle/>
+                    <a:p>
+                      <a:pPr algn="l"/>
+                      <a:r>
+                        <a:rPr sz="1000" b="0">
+                          <a:solidFill>
+                            <a:srgbClr val="1D1B43"/>
+                          </a:solidFill>
+                          <a:latin typeface="Calibri"/>
+                        </a:rPr>
+                        <a:t>1</a:t>
+                      </a:r>
+                    </a:p>
+                  </a:txBody>
+                  <a:tcPr>
+                    <a:solidFill>
+                      <a:srgbClr val="FFFFFF"/>
+                    </a:solidFill>
+                  </a:tcPr>
+                </a:tc>
+                <a:tc>
+                  <a:txBody>
+                    <a:bodyPr/>
+                    <a:lstStyle/>
+                    <a:p>
+                      <a:pPr algn="l"/>
+                      <a:r>
+                        <a:rPr sz="1000" b="0">
+                          <a:solidFill>
+                            <a:srgbClr val="1D1B43"/>
+                          </a:solidFill>
+                          <a:latin typeface="Calibri"/>
+                        </a:rPr>
+                        <a:t>0</a:t>
+                      </a:r>
+                    </a:p>
+                  </a:txBody>
+                  <a:tcPr>
+                    <a:solidFill>
+                      <a:srgbClr val="FFFFFF"/>
+                    </a:solidFill>
+                  </a:tcPr>
+                </a:tc>
+                <a:tc>
+                  <a:txBody>
+                    <a:bodyPr/>
+                    <a:lstStyle/>
+                    <a:p>
+                      <a:pPr algn="l"/>
+                      <a:r>
+                        <a:rPr sz="1000" b="0">
+                          <a:solidFill>
+                            <a:srgbClr val="1D1B43"/>
+                          </a:solidFill>
+                          <a:latin typeface="Calibri"/>
+                        </a:rPr>
+                        <a:t>100.0%</a:t>
+                      </a:r>
+                    </a:p>
+                  </a:txBody>
+                  <a:tcPr>
+                    <a:solidFill>
+                      <a:srgbClr val="FFFFFF"/>
+                    </a:solidFill>
+                  </a:tcPr>
+                </a:tc>
+                <a:tc>
+                  <a:txBody>
+                    <a:bodyPr/>
+                    <a:lstStyle/>
+                    <a:p>
+                      <a:pPr algn="l"/>
+                      <a:r>
+                        <a:rPr sz="1000" b="0">
+                          <a:solidFill>
+                            <a:srgbClr val="1D1B43"/>
+                          </a:solidFill>
+                          <a:latin typeface="Calibri"/>
+                        </a:rPr>
+                        <a:t>Excelente</a:t>
+                      </a:r>
+                    </a:p>
+                  </a:txBody>
+                  <a:tcPr>
+                    <a:solidFill>
+                      <a:srgbClr val="FFFFFF"/>
+                    </a:solidFill>
+                  </a:tcPr>
+                </a:tc>
+              </a:tr>
+            </a:tbl>
+          </a:graphicData>
+        </a:graphic>
+      </p:graphicFrame>
+    </p:spTree>
+  </p:cSld>
+  <p:clrMapOvr>
+    <a:masterClrMapping/>
+  </p:clrMapOvr>
+</p:sld>
+</file>
+
+<file path=ppt/slides/slide6.xml><?xml version="1.0" encoding="utf-8"?>
+<p:sld xmlns:a="http://schemas.openxmlformats.org/drawingml/2006/main" xmlns:p="http://schemas.openxmlformats.org/presentationml/2006/main" xmlns:r="http://schemas.openxmlformats.org/officeDocument/2006/relationships">
+  <p:cSld>
+    <p:bg>
+      <p:bgPr>
+        <a:solidFill>
+          <a:srgbClr val="FFFFFF"/>
+        </a:solidFill>
+        <a:effectLst/>
+      </p:bgPr>
+    </p:bg>
+    <p:spTree>
+      <p:nvGrpSpPr>
+        <p:cNvPr id="1" name=""/>
+        <p:cNvGrpSpPr/>
+        <p:nvPr/>
+      </p:nvGrpSpPr>
+      <p:grpSpPr/>
+      <p:pic>
+        <p:nvPicPr>
+          <p:cNvPr id="2" name="Picture 1" descr="slide2_img3.png"/>
+          <p:cNvPicPr>
+            <a:picLocks noChangeAspect="1"/>
+          </p:cNvPicPr>
+          <p:nvPr/>
+        </p:nvPicPr>
+        <p:blipFill>
+          <a:blip r:embed="rId2"/>
+          <a:stretch>
+            <a:fillRect/>
+          </a:stretch>
+        </p:blipFill>
+        <p:spPr>
+          <a:xfrm>
+            <a:off x="10661904" y="155448"/>
+            <a:ext cx="1380744" cy="667512"/>
+          </a:xfrm>
+          <a:prstGeom prst="rect">
+            <a:avLst/>
+          </a:prstGeom>
+        </p:spPr>
+      </p:pic>
+      <p:sp>
+        <p:nvSpPr>
+          <p:cNvPr id="3" name="TextBox 2"/>
+          <p:cNvSpPr txBox="1"/>
+          <p:nvPr/>
+        </p:nvSpPr>
+        <p:spPr>
+          <a:xfrm>
+            <a:off x="749808" y="502920"/>
             <a:ext cx="10058400" cy="914400"/>
           </a:xfrm>
           <a:prstGeom prst="rect">
@@ -5713,7 +7212,7 @@
                 </a:solidFill>
                 <a:latin typeface="Calibri"/>
               </a:rPr>
-              <a:t>TOP DESTINATARIOS (8 pontos)</a:t>
+              <a:t>TOP DESTINATARIOS (23 pontos)</a:t>
             </a:r>
           </a:p>
         </p:txBody>
@@ -5771,7 +7270,7 @@
         </p:nvGraphicFramePr>
         <p:xfrm>
           <a:off x="365760" y="1828800"/>
-          <a:ext cx="11521440" cy="3456432"/>
+          <a:ext cx="11521440" cy="4389120"/>
         </p:xfrm>
         <a:graphic>
           <a:graphicData uri="http://schemas.openxmlformats.org/drawingml/2006/table">
@@ -5788,7 +7287,7 @@
                 <a:gridCol w="1188720"/>
                 <a:gridCol w="2926080"/>
               </a:tblGrid>
-              <a:tr h="384048">
+              <a:tr h="292608">
                 <a:tc>
                   <a:txBody>
                     <a:bodyPr/>
@@ -5951,7 +7450,7 @@
                   </a:tcPr>
                 </a:tc>
               </a:tr>
-              <a:tr h="384048">
+              <a:tr h="292608">
                 <a:tc>
                   <a:txBody>
                     <a:bodyPr/>
@@ -5988,12 +7487,315 @@
                           </a:solidFill>
                           <a:latin typeface="Calibri"/>
                         </a:rPr>
+                        <a:t>AMAZON LOGISTICA DO - OSASCO / SP</a:t>
+                      </a:r>
+                    </a:p>
+                  </a:txBody>
+                  <a:tcPr>
+                    <a:solidFill>
+                      <a:srgbClr val="FFFFFF"/>
+                    </a:solidFill>
+                  </a:tcPr>
+                </a:tc>
+                <a:tc>
+                  <a:txBody>
+                    <a:bodyPr/>
+                    <a:lstStyle/>
+                    <a:p>
+                      <a:pPr algn="l"/>
+                      <a:r>
+                        <a:rPr sz="1000" b="0">
+                          <a:solidFill>
+                            <a:srgbClr val="1D1B43"/>
+                          </a:solidFill>
+                          <a:latin typeface="Calibri"/>
+                        </a:rPr>
+                        <a:t>4</a:t>
+                      </a:r>
+                    </a:p>
+                  </a:txBody>
+                  <a:tcPr>
+                    <a:solidFill>
+                      <a:srgbClr val="FFFFFF"/>
+                    </a:solidFill>
+                  </a:tcPr>
+                </a:tc>
+                <a:tc>
+                  <a:txBody>
+                    <a:bodyPr/>
+                    <a:lstStyle/>
+                    <a:p>
+                      <a:pPr algn="l"/>
+                      <a:r>
+                        <a:rPr sz="1000" b="0">
+                          <a:solidFill>
+                            <a:srgbClr val="1D1B43"/>
+                          </a:solidFill>
+                          <a:latin typeface="Calibri"/>
+                        </a:rPr>
+                        <a:t>4</a:t>
+                      </a:r>
+                    </a:p>
+                  </a:txBody>
+                  <a:tcPr>
+                    <a:solidFill>
+                      <a:srgbClr val="FFFFFF"/>
+                    </a:solidFill>
+                  </a:tcPr>
+                </a:tc>
+                <a:tc>
+                  <a:txBody>
+                    <a:bodyPr/>
+                    <a:lstStyle/>
+                    <a:p>
+                      <a:pPr algn="l"/>
+                      <a:r>
+                        <a:rPr sz="1000" b="0">
+                          <a:solidFill>
+                            <a:srgbClr val="1D1B43"/>
+                          </a:solidFill>
+                          <a:latin typeface="Calibri"/>
+                        </a:rPr>
+                        <a:t>0</a:t>
+                      </a:r>
+                    </a:p>
+                  </a:txBody>
+                  <a:tcPr>
+                    <a:solidFill>
+                      <a:srgbClr val="FFFFFF"/>
+                    </a:solidFill>
+                  </a:tcPr>
+                </a:tc>
+                <a:tc>
+                  <a:txBody>
+                    <a:bodyPr/>
+                    <a:lstStyle/>
+                    <a:p>
+                      <a:pPr algn="l"/>
+                      <a:r>
+                        <a:rPr sz="1000" b="0">
+                          <a:solidFill>
+                            <a:srgbClr val="1D1B43"/>
+                          </a:solidFill>
+                          <a:latin typeface="Calibri"/>
+                        </a:rPr>
+                        <a:t>100.0%</a:t>
+                      </a:r>
+                    </a:p>
+                  </a:txBody>
+                  <a:tcPr>
+                    <a:solidFill>
+                      <a:srgbClr val="FFFFFF"/>
+                    </a:solidFill>
+                  </a:tcPr>
+                </a:tc>
+                <a:tc>
+                  <a:txBody>
+                    <a:bodyPr/>
+                    <a:lstStyle/>
+                    <a:p>
+                      <a:pPr algn="l"/>
+                      <a:r>
+                        <a:rPr sz="1000" b="0">
+                          <a:solidFill>
+                            <a:srgbClr val="1D1B43"/>
+                          </a:solidFill>
+                          <a:latin typeface="Calibri"/>
+                        </a:rPr>
+                        <a:t>Excelente</a:t>
+                      </a:r>
+                    </a:p>
+                  </a:txBody>
+                  <a:tcPr>
+                    <a:solidFill>
+                      <a:srgbClr val="FFFFFF"/>
+                    </a:solidFill>
+                  </a:tcPr>
+                </a:tc>
+              </a:tr>
+              <a:tr h="292608">
+                <a:tc>
+                  <a:txBody>
+                    <a:bodyPr/>
+                    <a:lstStyle/>
+                    <a:p>
+                      <a:pPr algn="l"/>
+                      <a:r>
+                        <a:rPr sz="1000" b="0">
+                          <a:solidFill>
+                            <a:srgbClr val="1D1B43"/>
+                          </a:solidFill>
+                          <a:latin typeface="Calibri"/>
+                        </a:rPr>
+                        <a:t>2</a:t>
+                      </a:r>
+                    </a:p>
+                  </a:txBody>
+                  <a:tcPr>
+                    <a:solidFill>
+                      <a:srgbClr val="F2F2F2"/>
+                    </a:solidFill>
+                  </a:tcPr>
+                </a:tc>
+                <a:tc>
+                  <a:txBody>
+                    <a:bodyPr/>
+                    <a:lstStyle/>
+                    <a:p>
+                      <a:pPr algn="l"/>
+                      <a:r>
+                        <a:rPr sz="1000" b="0">
+                          <a:solidFill>
+                            <a:srgbClr val="1D1B43"/>
+                          </a:solidFill>
+                          <a:latin typeface="Calibri"/>
+                        </a:rPr>
                         <a:t>AMAZON SERVICOS DE V - SAO PAULO / SP</a:t>
                       </a:r>
                     </a:p>
                   </a:txBody>
                   <a:tcPr>
                     <a:solidFill>
+                      <a:srgbClr val="F2F2F2"/>
+                    </a:solidFill>
+                  </a:tcPr>
+                </a:tc>
+                <a:tc>
+                  <a:txBody>
+                    <a:bodyPr/>
+                    <a:lstStyle/>
+                    <a:p>
+                      <a:pPr algn="l"/>
+                      <a:r>
+                        <a:rPr sz="1000" b="0">
+                          <a:solidFill>
+                            <a:srgbClr val="1D1B43"/>
+                          </a:solidFill>
+                          <a:latin typeface="Calibri"/>
+                        </a:rPr>
+                        <a:t>4</a:t>
+                      </a:r>
+                    </a:p>
+                  </a:txBody>
+                  <a:tcPr>
+                    <a:solidFill>
+                      <a:srgbClr val="F2F2F2"/>
+                    </a:solidFill>
+                  </a:tcPr>
+                </a:tc>
+                <a:tc>
+                  <a:txBody>
+                    <a:bodyPr/>
+                    <a:lstStyle/>
+                    <a:p>
+                      <a:pPr algn="l"/>
+                      <a:r>
+                        <a:rPr sz="1000" b="0">
+                          <a:solidFill>
+                            <a:srgbClr val="1D1B43"/>
+                          </a:solidFill>
+                          <a:latin typeface="Calibri"/>
+                        </a:rPr>
+                        <a:t>4</a:t>
+                      </a:r>
+                    </a:p>
+                  </a:txBody>
+                  <a:tcPr>
+                    <a:solidFill>
+                      <a:srgbClr val="F2F2F2"/>
+                    </a:solidFill>
+                  </a:tcPr>
+                </a:tc>
+                <a:tc>
+                  <a:txBody>
+                    <a:bodyPr/>
+                    <a:lstStyle/>
+                    <a:p>
+                      <a:pPr algn="l"/>
+                      <a:r>
+                        <a:rPr sz="1000" b="0">
+                          <a:solidFill>
+                            <a:srgbClr val="1D1B43"/>
+                          </a:solidFill>
+                          <a:latin typeface="Calibri"/>
+                        </a:rPr>
+                        <a:t>0</a:t>
+                      </a:r>
+                    </a:p>
+                  </a:txBody>
+                  <a:tcPr>
+                    <a:solidFill>
+                      <a:srgbClr val="F2F2F2"/>
+                    </a:solidFill>
+                  </a:tcPr>
+                </a:tc>
+                <a:tc>
+                  <a:txBody>
+                    <a:bodyPr/>
+                    <a:lstStyle/>
+                    <a:p>
+                      <a:pPr algn="l"/>
+                      <a:r>
+                        <a:rPr sz="1000" b="0">
+                          <a:solidFill>
+                            <a:srgbClr val="1D1B43"/>
+                          </a:solidFill>
+                          <a:latin typeface="Calibri"/>
+                        </a:rPr>
+                        <a:t>100.0%</a:t>
+                      </a:r>
+                    </a:p>
+                  </a:txBody>
+                  <a:tcPr>
+                    <a:solidFill>
+                      <a:srgbClr val="F2F2F2"/>
+                    </a:solidFill>
+                  </a:tcPr>
+                </a:tc>
+                <a:tc>
+                  <a:txBody>
+                    <a:bodyPr/>
+                    <a:lstStyle/>
+                    <a:p>
+                      <a:pPr algn="l"/>
+                      <a:r>
+                        <a:rPr sz="1000" b="0">
+                          <a:solidFill>
+                            <a:srgbClr val="1D1B43"/>
+                          </a:solidFill>
+                          <a:latin typeface="Calibri"/>
+                        </a:rPr>
+                        <a:t>Excelente</a:t>
+                      </a:r>
+                    </a:p>
+                  </a:txBody>
+                  <a:tcPr>
+                    <a:solidFill>
+                      <a:srgbClr val="F2F2F2"/>
+                    </a:solidFill>
+                  </a:tcPr>
+                </a:tc>
+              </a:tr>
+              <a:tr h="292608">
+                <a:tc>
+                  <a:txBody>
+                    <a:bodyPr/>
+                    <a:lstStyle/>
+                    <a:p>
+                      <a:pPr algn="l"/>
+                      <a:r>
+                        <a:rPr sz="1000" b="0">
+                          <a:solidFill>
+                            <a:srgbClr val="1D1B43"/>
+                          </a:solidFill>
+                          <a:latin typeface="Calibri"/>
+                        </a:rPr>
+                        <a:t>3</a:t>
+                      </a:r>
+                    </a:p>
+                  </a:txBody>
+                  <a:tcPr>
+                    <a:solidFill>
                       <a:srgbClr val="FFFFFF"/>
                     </a:solidFill>
                   </a:tcPr>
@@ -6011,6 +7813,355 @@
                           </a:solidFill>
                           <a:latin typeface="Calibri"/>
                         </a:rPr>
+                        <a:t>AC COMERCIAL IMPORTA - SAO PAULO / SP</a:t>
+                      </a:r>
+                    </a:p>
+                  </a:txBody>
+                  <a:tcPr>
+                    <a:solidFill>
+                      <a:srgbClr val="FFFFFF"/>
+                    </a:solidFill>
+                  </a:tcPr>
+                </a:tc>
+                <a:tc>
+                  <a:txBody>
+                    <a:bodyPr/>
+                    <a:lstStyle/>
+                    <a:p>
+                      <a:pPr algn="l"/>
+                      <a:r>
+                        <a:rPr sz="1000" b="0">
+                          <a:solidFill>
+                            <a:srgbClr val="1D1B43"/>
+                          </a:solidFill>
+                          <a:latin typeface="Calibri"/>
+                        </a:rPr>
+                        <a:t>3</a:t>
+                      </a:r>
+                    </a:p>
+                  </a:txBody>
+                  <a:tcPr>
+                    <a:solidFill>
+                      <a:srgbClr val="FFFFFF"/>
+                    </a:solidFill>
+                  </a:tcPr>
+                </a:tc>
+                <a:tc>
+                  <a:txBody>
+                    <a:bodyPr/>
+                    <a:lstStyle/>
+                    <a:p>
+                      <a:pPr algn="l"/>
+                      <a:r>
+                        <a:rPr sz="1000" b="0">
+                          <a:solidFill>
+                            <a:srgbClr val="1D1B43"/>
+                          </a:solidFill>
+                          <a:latin typeface="Calibri"/>
+                        </a:rPr>
+                        <a:t>3</a:t>
+                      </a:r>
+                    </a:p>
+                  </a:txBody>
+                  <a:tcPr>
+                    <a:solidFill>
+                      <a:srgbClr val="FFFFFF"/>
+                    </a:solidFill>
+                  </a:tcPr>
+                </a:tc>
+                <a:tc>
+                  <a:txBody>
+                    <a:bodyPr/>
+                    <a:lstStyle/>
+                    <a:p>
+                      <a:pPr algn="l"/>
+                      <a:r>
+                        <a:rPr sz="1000" b="0">
+                          <a:solidFill>
+                            <a:srgbClr val="1D1B43"/>
+                          </a:solidFill>
+                          <a:latin typeface="Calibri"/>
+                        </a:rPr>
+                        <a:t>0</a:t>
+                      </a:r>
+                    </a:p>
+                  </a:txBody>
+                  <a:tcPr>
+                    <a:solidFill>
+                      <a:srgbClr val="FFFFFF"/>
+                    </a:solidFill>
+                  </a:tcPr>
+                </a:tc>
+                <a:tc>
+                  <a:txBody>
+                    <a:bodyPr/>
+                    <a:lstStyle/>
+                    <a:p>
+                      <a:pPr algn="l"/>
+                      <a:r>
+                        <a:rPr sz="1000" b="0">
+                          <a:solidFill>
+                            <a:srgbClr val="1D1B43"/>
+                          </a:solidFill>
+                          <a:latin typeface="Calibri"/>
+                        </a:rPr>
+                        <a:t>100.0%</a:t>
+                      </a:r>
+                    </a:p>
+                  </a:txBody>
+                  <a:tcPr>
+                    <a:solidFill>
+                      <a:srgbClr val="FFFFFF"/>
+                    </a:solidFill>
+                  </a:tcPr>
+                </a:tc>
+                <a:tc>
+                  <a:txBody>
+                    <a:bodyPr/>
+                    <a:lstStyle/>
+                    <a:p>
+                      <a:pPr algn="l"/>
+                      <a:r>
+                        <a:rPr sz="1000" b="0">
+                          <a:solidFill>
+                            <a:srgbClr val="1D1B43"/>
+                          </a:solidFill>
+                          <a:latin typeface="Calibri"/>
+                        </a:rPr>
+                        <a:t>Excelente</a:t>
+                      </a:r>
+                    </a:p>
+                  </a:txBody>
+                  <a:tcPr>
+                    <a:solidFill>
+                      <a:srgbClr val="FFFFFF"/>
+                    </a:solidFill>
+                  </a:tcPr>
+                </a:tc>
+              </a:tr>
+              <a:tr h="292608">
+                <a:tc>
+                  <a:txBody>
+                    <a:bodyPr/>
+                    <a:lstStyle/>
+                    <a:p>
+                      <a:pPr algn="l"/>
+                      <a:r>
+                        <a:rPr sz="1000" b="0">
+                          <a:solidFill>
+                            <a:srgbClr val="1D1B43"/>
+                          </a:solidFill>
+                          <a:latin typeface="Calibri"/>
+                        </a:rPr>
+                        <a:t>4</a:t>
+                      </a:r>
+                    </a:p>
+                  </a:txBody>
+                  <a:tcPr>
+                    <a:solidFill>
+                      <a:srgbClr val="F2F2F2"/>
+                    </a:solidFill>
+                  </a:tcPr>
+                </a:tc>
+                <a:tc>
+                  <a:txBody>
+                    <a:bodyPr/>
+                    <a:lstStyle/>
+                    <a:p>
+                      <a:pPr algn="l"/>
+                      <a:r>
+                        <a:rPr sz="1000" b="0">
+                          <a:solidFill>
+                            <a:srgbClr val="1D1B43"/>
+                          </a:solidFill>
+                          <a:latin typeface="Calibri"/>
+                        </a:rPr>
+                        <a:t>AMAZON SERVICOS DE V - CAJAMAR / SP</a:t>
+                      </a:r>
+                    </a:p>
+                  </a:txBody>
+                  <a:tcPr>
+                    <a:solidFill>
+                      <a:srgbClr val="F2F2F2"/>
+                    </a:solidFill>
+                  </a:tcPr>
+                </a:tc>
+                <a:tc>
+                  <a:txBody>
+                    <a:bodyPr/>
+                    <a:lstStyle/>
+                    <a:p>
+                      <a:pPr algn="l"/>
+                      <a:r>
+                        <a:rPr sz="1000" b="0">
+                          <a:solidFill>
+                            <a:srgbClr val="1D1B43"/>
+                          </a:solidFill>
+                          <a:latin typeface="Calibri"/>
+                        </a:rPr>
+                        <a:t>3</a:t>
+                      </a:r>
+                    </a:p>
+                  </a:txBody>
+                  <a:tcPr>
+                    <a:solidFill>
+                      <a:srgbClr val="F2F2F2"/>
+                    </a:solidFill>
+                  </a:tcPr>
+                </a:tc>
+                <a:tc>
+                  <a:txBody>
+                    <a:bodyPr/>
+                    <a:lstStyle/>
+                    <a:p>
+                      <a:pPr algn="l"/>
+                      <a:r>
+                        <a:rPr sz="1000" b="0">
+                          <a:solidFill>
+                            <a:srgbClr val="1D1B43"/>
+                          </a:solidFill>
+                          <a:latin typeface="Calibri"/>
+                        </a:rPr>
+                        <a:t>3</a:t>
+                      </a:r>
+                    </a:p>
+                  </a:txBody>
+                  <a:tcPr>
+                    <a:solidFill>
+                      <a:srgbClr val="F2F2F2"/>
+                    </a:solidFill>
+                  </a:tcPr>
+                </a:tc>
+                <a:tc>
+                  <a:txBody>
+                    <a:bodyPr/>
+                    <a:lstStyle/>
+                    <a:p>
+                      <a:pPr algn="l"/>
+                      <a:r>
+                        <a:rPr sz="1000" b="0">
+                          <a:solidFill>
+                            <a:srgbClr val="1D1B43"/>
+                          </a:solidFill>
+                          <a:latin typeface="Calibri"/>
+                        </a:rPr>
+                        <a:t>0</a:t>
+                      </a:r>
+                    </a:p>
+                  </a:txBody>
+                  <a:tcPr>
+                    <a:solidFill>
+                      <a:srgbClr val="F2F2F2"/>
+                    </a:solidFill>
+                  </a:tcPr>
+                </a:tc>
+                <a:tc>
+                  <a:txBody>
+                    <a:bodyPr/>
+                    <a:lstStyle/>
+                    <a:p>
+                      <a:pPr algn="l"/>
+                      <a:r>
+                        <a:rPr sz="1000" b="0">
+                          <a:solidFill>
+                            <a:srgbClr val="1D1B43"/>
+                          </a:solidFill>
+                          <a:latin typeface="Calibri"/>
+                        </a:rPr>
+                        <a:t>100.0%</a:t>
+                      </a:r>
+                    </a:p>
+                  </a:txBody>
+                  <a:tcPr>
+                    <a:solidFill>
+                      <a:srgbClr val="F2F2F2"/>
+                    </a:solidFill>
+                  </a:tcPr>
+                </a:tc>
+                <a:tc>
+                  <a:txBody>
+                    <a:bodyPr/>
+                    <a:lstStyle/>
+                    <a:p>
+                      <a:pPr algn="l"/>
+                      <a:r>
+                        <a:rPr sz="1000" b="0">
+                          <a:solidFill>
+                            <a:srgbClr val="1D1B43"/>
+                          </a:solidFill>
+                          <a:latin typeface="Calibri"/>
+                        </a:rPr>
+                        <a:t>Excelente</a:t>
+                      </a:r>
+                    </a:p>
+                  </a:txBody>
+                  <a:tcPr>
+                    <a:solidFill>
+                      <a:srgbClr val="F2F2F2"/>
+                    </a:solidFill>
+                  </a:tcPr>
+                </a:tc>
+              </a:tr>
+              <a:tr h="292608">
+                <a:tc>
+                  <a:txBody>
+                    <a:bodyPr/>
+                    <a:lstStyle/>
+                    <a:p>
+                      <a:pPr algn="l"/>
+                      <a:r>
+                        <a:rPr sz="1000" b="0">
+                          <a:solidFill>
+                            <a:srgbClr val="1D1B43"/>
+                          </a:solidFill>
+                          <a:latin typeface="Calibri"/>
+                        </a:rPr>
+                        <a:t>5</a:t>
+                      </a:r>
+                    </a:p>
+                  </a:txBody>
+                  <a:tcPr>
+                    <a:solidFill>
+                      <a:srgbClr val="FFFFFF"/>
+                    </a:solidFill>
+                  </a:tcPr>
+                </a:tc>
+                <a:tc>
+                  <a:txBody>
+                    <a:bodyPr/>
+                    <a:lstStyle/>
+                    <a:p>
+                      <a:pPr algn="l"/>
+                      <a:r>
+                        <a:rPr sz="1000" b="0">
+                          <a:solidFill>
+                            <a:srgbClr val="1D1B43"/>
+                          </a:solidFill>
+                          <a:latin typeface="Calibri"/>
+                        </a:rPr>
+                        <a:t>CAIO RODRIGUES DA CU - SAO PAULO / SP</a:t>
+                      </a:r>
+                    </a:p>
+                  </a:txBody>
+                  <a:tcPr>
+                    <a:solidFill>
+                      <a:srgbClr val="FFFFFF"/>
+                    </a:solidFill>
+                  </a:tcPr>
+                </a:tc>
+                <a:tc>
+                  <a:txBody>
+                    <a:bodyPr/>
+                    <a:lstStyle/>
+                    <a:p>
+                      <a:pPr algn="l"/>
+                      <a:r>
+                        <a:rPr sz="1000" b="0">
+                          <a:solidFill>
+                            <a:srgbClr val="1D1B43"/>
+                          </a:solidFill>
+                          <a:latin typeface="Calibri"/>
+                        </a:rPr>
                         <a:t>2</a:t>
                       </a:r>
                     </a:p>
@@ -6114,7 +8265,53 @@
                   </a:tcPr>
                 </a:tc>
               </a:tr>
-              <a:tr h="384048">
+              <a:tr h="292608">
+                <a:tc>
+                  <a:txBody>
+                    <a:bodyPr/>
+                    <a:lstStyle/>
+                    <a:p>
+                      <a:pPr algn="l"/>
+                      <a:r>
+                        <a:rPr sz="1000" b="0">
+                          <a:solidFill>
+                            <a:srgbClr val="1D1B43"/>
+                          </a:solidFill>
+                          <a:latin typeface="Calibri"/>
+                        </a:rPr>
+                        <a:t>6</a:t>
+                      </a:r>
+                    </a:p>
+                  </a:txBody>
+                  <a:tcPr>
+                    <a:solidFill>
+                      <a:srgbClr val="F2F2F2"/>
+                    </a:solidFill>
+                  </a:tcPr>
+                </a:tc>
+                <a:tc>
+                  <a:txBody>
+                    <a:bodyPr/>
+                    <a:lstStyle/>
+                    <a:p>
+                      <a:pPr algn="l"/>
+                      <a:r>
+                        <a:rPr sz="1000" b="0">
+                          <a:solidFill>
+                            <a:srgbClr val="1D1B43"/>
+                          </a:solidFill>
+                          <a:latin typeface="Calibri"/>
+                        </a:rPr>
+                        <a:t>EBAZAR.COM.BR. LTDA - CAJAMAR / SP</a:t>
+                      </a:r>
+                    </a:p>
+                  </a:txBody>
+                  <a:tcPr>
+                    <a:solidFill>
+                      <a:srgbClr val="F2F2F2"/>
+                    </a:solidFill>
+                  </a:tcPr>
+                </a:tc>
                 <a:tc>
                   <a:txBody>
                     <a:bodyPr/>
@@ -6151,7 +8348,7 @@
                           </a:solidFill>
                           <a:latin typeface="Calibri"/>
                         </a:rPr>
-                        <a:t>AC COMERCIAL IMPORTA - SAO PAULO / SP</a:t>
+                        <a:t>2</a:t>
                       </a:r>
                     </a:p>
                   </a:txBody>
@@ -6174,12 +8371,246 @@
                           </a:solidFill>
                           <a:latin typeface="Calibri"/>
                         </a:rPr>
+                        <a:t>0</a:t>
+                      </a:r>
+                    </a:p>
+                  </a:txBody>
+                  <a:tcPr>
+                    <a:solidFill>
+                      <a:srgbClr val="F2F2F2"/>
+                    </a:solidFill>
+                  </a:tcPr>
+                </a:tc>
+                <a:tc>
+                  <a:txBody>
+                    <a:bodyPr/>
+                    <a:lstStyle/>
+                    <a:p>
+                      <a:pPr algn="l"/>
+                      <a:r>
+                        <a:rPr sz="1000" b="0">
+                          <a:solidFill>
+                            <a:srgbClr val="1D1B43"/>
+                          </a:solidFill>
+                          <a:latin typeface="Calibri"/>
+                        </a:rPr>
+                        <a:t>100.0%</a:t>
+                      </a:r>
+                    </a:p>
+                  </a:txBody>
+                  <a:tcPr>
+                    <a:solidFill>
+                      <a:srgbClr val="F2F2F2"/>
+                    </a:solidFill>
+                  </a:tcPr>
+                </a:tc>
+                <a:tc>
+                  <a:txBody>
+                    <a:bodyPr/>
+                    <a:lstStyle/>
+                    <a:p>
+                      <a:pPr algn="l"/>
+                      <a:r>
+                        <a:rPr sz="1000" b="0">
+                          <a:solidFill>
+                            <a:srgbClr val="1D1B43"/>
+                          </a:solidFill>
+                          <a:latin typeface="Calibri"/>
+                        </a:rPr>
+                        <a:t>Excelente</a:t>
+                      </a:r>
+                    </a:p>
+                  </a:txBody>
+                  <a:tcPr>
+                    <a:solidFill>
+                      <a:srgbClr val="F2F2F2"/>
+                    </a:solidFill>
+                  </a:tcPr>
+                </a:tc>
+              </a:tr>
+              <a:tr h="292608">
+                <a:tc>
+                  <a:txBody>
+                    <a:bodyPr/>
+                    <a:lstStyle/>
+                    <a:p>
+                      <a:pPr algn="l"/>
+                      <a:r>
+                        <a:rPr sz="1000" b="0">
+                          <a:solidFill>
+                            <a:srgbClr val="1D1B43"/>
+                          </a:solidFill>
+                          <a:latin typeface="Calibri"/>
+                        </a:rPr>
+                        <a:t>7</a:t>
+                      </a:r>
+                    </a:p>
+                  </a:txBody>
+                  <a:tcPr>
+                    <a:solidFill>
+                      <a:srgbClr val="FFFFFF"/>
+                    </a:solidFill>
+                  </a:tcPr>
+                </a:tc>
+                <a:tc>
+                  <a:txBody>
+                    <a:bodyPr/>
+                    <a:lstStyle/>
+                    <a:p>
+                      <a:pPr algn="l"/>
+                      <a:r>
+                        <a:rPr sz="1000" b="0">
+                          <a:solidFill>
+                            <a:srgbClr val="1D1B43"/>
+                          </a:solidFill>
+                          <a:latin typeface="Calibri"/>
+                        </a:rPr>
+                        <a:t>AMAZON LOGISTICA DO - BAYEUX / PB</a:t>
+                      </a:r>
+                    </a:p>
+                  </a:txBody>
+                  <a:tcPr>
+                    <a:solidFill>
+                      <a:srgbClr val="FFFFFF"/>
+                    </a:solidFill>
+                  </a:tcPr>
+                </a:tc>
+                <a:tc>
+                  <a:txBody>
+                    <a:bodyPr/>
+                    <a:lstStyle/>
+                    <a:p>
+                      <a:pPr algn="l"/>
+                      <a:r>
+                        <a:rPr sz="1000" b="0">
+                          <a:solidFill>
+                            <a:srgbClr val="1D1B43"/>
+                          </a:solidFill>
+                          <a:latin typeface="Calibri"/>
+                        </a:rPr>
                         <a:t>1</a:t>
                       </a:r>
                     </a:p>
                   </a:txBody>
                   <a:tcPr>
                     <a:solidFill>
+                      <a:srgbClr val="FFFFFF"/>
+                    </a:solidFill>
+                  </a:tcPr>
+                </a:tc>
+                <a:tc>
+                  <a:txBody>
+                    <a:bodyPr/>
+                    <a:lstStyle/>
+                    <a:p>
+                      <a:pPr algn="l"/>
+                      <a:r>
+                        <a:rPr sz="1000" b="0">
+                          <a:solidFill>
+                            <a:srgbClr val="1D1B43"/>
+                          </a:solidFill>
+                          <a:latin typeface="Calibri"/>
+                        </a:rPr>
+                        <a:t>1</a:t>
+                      </a:r>
+                    </a:p>
+                  </a:txBody>
+                  <a:tcPr>
+                    <a:solidFill>
+                      <a:srgbClr val="FFFFFF"/>
+                    </a:solidFill>
+                  </a:tcPr>
+                </a:tc>
+                <a:tc>
+                  <a:txBody>
+                    <a:bodyPr/>
+                    <a:lstStyle/>
+                    <a:p>
+                      <a:pPr algn="l"/>
+                      <a:r>
+                        <a:rPr sz="1000" b="0">
+                          <a:solidFill>
+                            <a:srgbClr val="1D1B43"/>
+                          </a:solidFill>
+                          <a:latin typeface="Calibri"/>
+                        </a:rPr>
+                        <a:t>0</a:t>
+                      </a:r>
+                    </a:p>
+                  </a:txBody>
+                  <a:tcPr>
+                    <a:solidFill>
+                      <a:srgbClr val="FFFFFF"/>
+                    </a:solidFill>
+                  </a:tcPr>
+                </a:tc>
+                <a:tc>
+                  <a:txBody>
+                    <a:bodyPr/>
+                    <a:lstStyle/>
+                    <a:p>
+                      <a:pPr algn="l"/>
+                      <a:r>
+                        <a:rPr sz="1000" b="0">
+                          <a:solidFill>
+                            <a:srgbClr val="1D1B43"/>
+                          </a:solidFill>
+                          <a:latin typeface="Calibri"/>
+                        </a:rPr>
+                        <a:t>100.0%</a:t>
+                      </a:r>
+                    </a:p>
+                  </a:txBody>
+                  <a:tcPr>
+                    <a:solidFill>
+                      <a:srgbClr val="FFFFFF"/>
+                    </a:solidFill>
+                  </a:tcPr>
+                </a:tc>
+                <a:tc>
+                  <a:txBody>
+                    <a:bodyPr/>
+                    <a:lstStyle/>
+                    <a:p>
+                      <a:pPr algn="l"/>
+                      <a:r>
+                        <a:rPr sz="1000" b="0">
+                          <a:solidFill>
+                            <a:srgbClr val="1D1B43"/>
+                          </a:solidFill>
+                          <a:latin typeface="Calibri"/>
+                        </a:rPr>
+                        <a:t>Excelente</a:t>
+                      </a:r>
+                    </a:p>
+                  </a:txBody>
+                  <a:tcPr>
+                    <a:solidFill>
+                      <a:srgbClr val="FFFFFF"/>
+                    </a:solidFill>
+                  </a:tcPr>
+                </a:tc>
+              </a:tr>
+              <a:tr h="292608">
+                <a:tc>
+                  <a:txBody>
+                    <a:bodyPr/>
+                    <a:lstStyle/>
+                    <a:p>
+                      <a:pPr algn="l"/>
+                      <a:r>
+                        <a:rPr sz="1000" b="0">
+                          <a:solidFill>
+                            <a:srgbClr val="1D1B43"/>
+                          </a:solidFill>
+                          <a:latin typeface="Calibri"/>
+                        </a:rPr>
+                        <a:t>8</a:t>
+                      </a:r>
+                    </a:p>
+                  </a:txBody>
+                  <a:tcPr>
+                    <a:solidFill>
                       <a:srgbClr val="F2F2F2"/>
                     </a:solidFill>
                   </a:tcPr>
@@ -6197,6 +8628,29 @@
                           </a:solidFill>
                           <a:latin typeface="Calibri"/>
                         </a:rPr>
+                        <a:t>AMAZON LOGISTICA DO - MANAUS / AM</a:t>
+                      </a:r>
+                    </a:p>
+                  </a:txBody>
+                  <a:tcPr>
+                    <a:solidFill>
+                      <a:srgbClr val="F2F2F2"/>
+                    </a:solidFill>
+                  </a:tcPr>
+                </a:tc>
+                <a:tc>
+                  <a:txBody>
+                    <a:bodyPr/>
+                    <a:lstStyle/>
+                    <a:p>
+                      <a:pPr algn="l"/>
+                      <a:r>
+                        <a:rPr sz="1000" b="0">
+                          <a:solidFill>
+                            <a:srgbClr val="1D1B43"/>
+                          </a:solidFill>
+                          <a:latin typeface="Calibri"/>
+                        </a:rPr>
                         <a:t>1</a:t>
                       </a:r>
                     </a:p>
@@ -6243,12 +8697,246 @@
                           </a:solidFill>
                           <a:latin typeface="Calibri"/>
                         </a:rPr>
+                        <a:t>1</a:t>
+                      </a:r>
+                    </a:p>
+                  </a:txBody>
+                  <a:tcPr>
+                    <a:solidFill>
+                      <a:srgbClr val="F2F2F2"/>
+                    </a:solidFill>
+                  </a:tcPr>
+                </a:tc>
+                <a:tc>
+                  <a:txBody>
+                    <a:bodyPr/>
+                    <a:lstStyle/>
+                    <a:p>
+                      <a:pPr algn="l"/>
+                      <a:r>
+                        <a:rPr sz="1000" b="0">
+                          <a:solidFill>
+                            <a:srgbClr val="1D1B43"/>
+                          </a:solidFill>
+                          <a:latin typeface="Calibri"/>
+                        </a:rPr>
+                        <a:t>0.0%</a:t>
+                      </a:r>
+                    </a:p>
+                  </a:txBody>
+                  <a:tcPr>
+                    <a:solidFill>
+                      <a:srgbClr val="F2F2F2"/>
+                    </a:solidFill>
+                  </a:tcPr>
+                </a:tc>
+                <a:tc>
+                  <a:txBody>
+                    <a:bodyPr/>
+                    <a:lstStyle/>
+                    <a:p>
+                      <a:pPr algn="l"/>
+                      <a:r>
+                        <a:rPr sz="1000" b="0">
+                          <a:solidFill>
+                            <a:srgbClr val="1D1B43"/>
+                          </a:solidFill>
+                          <a:latin typeface="Calibri"/>
+                        </a:rPr>
+                        <a:t>Atencao</a:t>
+                      </a:r>
+                    </a:p>
+                  </a:txBody>
+                  <a:tcPr>
+                    <a:solidFill>
+                      <a:srgbClr val="F2F2F2"/>
+                    </a:solidFill>
+                  </a:tcPr>
+                </a:tc>
+              </a:tr>
+              <a:tr h="292608">
+                <a:tc>
+                  <a:txBody>
+                    <a:bodyPr/>
+                    <a:lstStyle/>
+                    <a:p>
+                      <a:pPr algn="l"/>
+                      <a:r>
+                        <a:rPr sz="1000" b="0">
+                          <a:solidFill>
+                            <a:srgbClr val="1D1B43"/>
+                          </a:solidFill>
+                          <a:latin typeface="Calibri"/>
+                        </a:rPr>
+                        <a:t>9</a:t>
+                      </a:r>
+                    </a:p>
+                  </a:txBody>
+                  <a:tcPr>
+                    <a:solidFill>
+                      <a:srgbClr val="FFFFFF"/>
+                    </a:solidFill>
+                  </a:tcPr>
+                </a:tc>
+                <a:tc>
+                  <a:txBody>
+                    <a:bodyPr/>
+                    <a:lstStyle/>
+                    <a:p>
+                      <a:pPr algn="l"/>
+                      <a:r>
+                        <a:rPr sz="1000" b="0">
+                          <a:solidFill>
+                            <a:srgbClr val="1D1B43"/>
+                          </a:solidFill>
+                          <a:latin typeface="Calibri"/>
+                        </a:rPr>
+                        <a:t>AMAZON LOGISTICA DO - JABOATAO DOS GUARARAPES / </a:t>
+                      </a:r>
+                    </a:p>
+                  </a:txBody>
+                  <a:tcPr>
+                    <a:solidFill>
+                      <a:srgbClr val="FFFFFF"/>
+                    </a:solidFill>
+                  </a:tcPr>
+                </a:tc>
+                <a:tc>
+                  <a:txBody>
+                    <a:bodyPr/>
+                    <a:lstStyle/>
+                    <a:p>
+                      <a:pPr algn="l"/>
+                      <a:r>
+                        <a:rPr sz="1000" b="0">
+                          <a:solidFill>
+                            <a:srgbClr val="1D1B43"/>
+                          </a:solidFill>
+                          <a:latin typeface="Calibri"/>
+                        </a:rPr>
+                        <a:t>1</a:t>
+                      </a:r>
+                    </a:p>
+                  </a:txBody>
+                  <a:tcPr>
+                    <a:solidFill>
+                      <a:srgbClr val="FFFFFF"/>
+                    </a:solidFill>
+                  </a:tcPr>
+                </a:tc>
+                <a:tc>
+                  <a:txBody>
+                    <a:bodyPr/>
+                    <a:lstStyle/>
+                    <a:p>
+                      <a:pPr algn="l"/>
+                      <a:r>
+                        <a:rPr sz="1000" b="0">
+                          <a:solidFill>
+                            <a:srgbClr val="1D1B43"/>
+                          </a:solidFill>
+                          <a:latin typeface="Calibri"/>
+                        </a:rPr>
+                        <a:t>1</a:t>
+                      </a:r>
+                    </a:p>
+                  </a:txBody>
+                  <a:tcPr>
+                    <a:solidFill>
+                      <a:srgbClr val="FFFFFF"/>
+                    </a:solidFill>
+                  </a:tcPr>
+                </a:tc>
+                <a:tc>
+                  <a:txBody>
+                    <a:bodyPr/>
+                    <a:lstStyle/>
+                    <a:p>
+                      <a:pPr algn="l"/>
+                      <a:r>
+                        <a:rPr sz="1000" b="0">
+                          <a:solidFill>
+                            <a:srgbClr val="1D1B43"/>
+                          </a:solidFill>
+                          <a:latin typeface="Calibri"/>
+                        </a:rPr>
+                        <a:t>0</a:t>
+                      </a:r>
+                    </a:p>
+                  </a:txBody>
+                  <a:tcPr>
+                    <a:solidFill>
+                      <a:srgbClr val="FFFFFF"/>
+                    </a:solidFill>
+                  </a:tcPr>
+                </a:tc>
+                <a:tc>
+                  <a:txBody>
+                    <a:bodyPr/>
+                    <a:lstStyle/>
+                    <a:p>
+                      <a:pPr algn="l"/>
+                      <a:r>
+                        <a:rPr sz="1000" b="0">
+                          <a:solidFill>
+                            <a:srgbClr val="1D1B43"/>
+                          </a:solidFill>
+                          <a:latin typeface="Calibri"/>
+                        </a:rPr>
                         <a:t>100.0%</a:t>
                       </a:r>
                     </a:p>
                   </a:txBody>
                   <a:tcPr>
                     <a:solidFill>
+                      <a:srgbClr val="FFFFFF"/>
+                    </a:solidFill>
+                  </a:tcPr>
+                </a:tc>
+                <a:tc>
+                  <a:txBody>
+                    <a:bodyPr/>
+                    <a:lstStyle/>
+                    <a:p>
+                      <a:pPr algn="l"/>
+                      <a:r>
+                        <a:rPr sz="1000" b="0">
+                          <a:solidFill>
+                            <a:srgbClr val="1D1B43"/>
+                          </a:solidFill>
+                          <a:latin typeface="Calibri"/>
+                        </a:rPr>
+                        <a:t>Excelente</a:t>
+                      </a:r>
+                    </a:p>
+                  </a:txBody>
+                  <a:tcPr>
+                    <a:solidFill>
+                      <a:srgbClr val="FFFFFF"/>
+                    </a:solidFill>
+                  </a:tcPr>
+                </a:tc>
+              </a:tr>
+              <a:tr h="292608">
+                <a:tc>
+                  <a:txBody>
+                    <a:bodyPr/>
+                    <a:lstStyle/>
+                    <a:p>
+                      <a:pPr algn="l"/>
+                      <a:r>
+                        <a:rPr sz="1000" b="0">
+                          <a:solidFill>
+                            <a:srgbClr val="1D1B43"/>
+                          </a:solidFill>
+                          <a:latin typeface="Calibri"/>
+                        </a:rPr>
+                        <a:t>10</a:t>
+                      </a:r>
+                    </a:p>
+                  </a:txBody>
+                  <a:tcPr>
+                    <a:solidFill>
                       <a:srgbClr val="F2F2F2"/>
                     </a:solidFill>
                   </a:tcPr>
@@ -6266,32 +8954,473 @@
                           </a:solidFill>
                           <a:latin typeface="Calibri"/>
                         </a:rPr>
+                        <a:t>AMAZON LOGISTICA DO - FORTALEZA / CE</a:t>
+                      </a:r>
+                    </a:p>
+                  </a:txBody>
+                  <a:tcPr>
+                    <a:solidFill>
+                      <a:srgbClr val="F2F2F2"/>
+                    </a:solidFill>
+                  </a:tcPr>
+                </a:tc>
+                <a:tc>
+                  <a:txBody>
+                    <a:bodyPr/>
+                    <a:lstStyle/>
+                    <a:p>
+                      <a:pPr algn="l"/>
+                      <a:r>
+                        <a:rPr sz="1000" b="0">
+                          <a:solidFill>
+                            <a:srgbClr val="1D1B43"/>
+                          </a:solidFill>
+                          <a:latin typeface="Calibri"/>
+                        </a:rPr>
+                        <a:t>1</a:t>
+                      </a:r>
+                    </a:p>
+                  </a:txBody>
+                  <a:tcPr>
+                    <a:solidFill>
+                      <a:srgbClr val="F2F2F2"/>
+                    </a:solidFill>
+                  </a:tcPr>
+                </a:tc>
+                <a:tc>
+                  <a:txBody>
+                    <a:bodyPr/>
+                    <a:lstStyle/>
+                    <a:p>
+                      <a:pPr algn="l"/>
+                      <a:r>
+                        <a:rPr sz="1000" b="0">
+                          <a:solidFill>
+                            <a:srgbClr val="1D1B43"/>
+                          </a:solidFill>
+                          <a:latin typeface="Calibri"/>
+                        </a:rPr>
+                        <a:t>0</a:t>
+                      </a:r>
+                    </a:p>
+                  </a:txBody>
+                  <a:tcPr>
+                    <a:solidFill>
+                      <a:srgbClr val="F2F2F2"/>
+                    </a:solidFill>
+                  </a:tcPr>
+                </a:tc>
+                <a:tc>
+                  <a:txBody>
+                    <a:bodyPr/>
+                    <a:lstStyle/>
+                    <a:p>
+                      <a:pPr algn="l"/>
+                      <a:r>
+                        <a:rPr sz="1000" b="0">
+                          <a:solidFill>
+                            <a:srgbClr val="1D1B43"/>
+                          </a:solidFill>
+                          <a:latin typeface="Calibri"/>
+                        </a:rPr>
+                        <a:t>1</a:t>
+                      </a:r>
+                    </a:p>
+                  </a:txBody>
+                  <a:tcPr>
+                    <a:solidFill>
+                      <a:srgbClr val="F2F2F2"/>
+                    </a:solidFill>
+                  </a:tcPr>
+                </a:tc>
+                <a:tc>
+                  <a:txBody>
+                    <a:bodyPr/>
+                    <a:lstStyle/>
+                    <a:p>
+                      <a:pPr algn="l"/>
+                      <a:r>
+                        <a:rPr sz="1000" b="0">
+                          <a:solidFill>
+                            <a:srgbClr val="1D1B43"/>
+                          </a:solidFill>
+                          <a:latin typeface="Calibri"/>
+                        </a:rPr>
+                        <a:t>0.0%</a:t>
+                      </a:r>
+                    </a:p>
+                  </a:txBody>
+                  <a:tcPr>
+                    <a:solidFill>
+                      <a:srgbClr val="F2F2F2"/>
+                    </a:solidFill>
+                  </a:tcPr>
+                </a:tc>
+                <a:tc>
+                  <a:txBody>
+                    <a:bodyPr/>
+                    <a:lstStyle/>
+                    <a:p>
+                      <a:pPr algn="l"/>
+                      <a:r>
+                        <a:rPr sz="1000" b="0">
+                          <a:solidFill>
+                            <a:srgbClr val="1D1B43"/>
+                          </a:solidFill>
+                          <a:latin typeface="Calibri"/>
+                        </a:rPr>
+                        <a:t>Atencao</a:t>
+                      </a:r>
+                    </a:p>
+                  </a:txBody>
+                  <a:tcPr>
+                    <a:solidFill>
+                      <a:srgbClr val="F2F2F2"/>
+                    </a:solidFill>
+                  </a:tcPr>
+                </a:tc>
+              </a:tr>
+              <a:tr h="292608">
+                <a:tc>
+                  <a:txBody>
+                    <a:bodyPr/>
+                    <a:lstStyle/>
+                    <a:p>
+                      <a:pPr algn="l"/>
+                      <a:r>
+                        <a:rPr sz="1000" b="0">
+                          <a:solidFill>
+                            <a:srgbClr val="1D1B43"/>
+                          </a:solidFill>
+                          <a:latin typeface="Calibri"/>
+                        </a:rPr>
+                        <a:t>11</a:t>
+                      </a:r>
+                    </a:p>
+                  </a:txBody>
+                  <a:tcPr>
+                    <a:solidFill>
+                      <a:srgbClr val="FFFFFF"/>
+                    </a:solidFill>
+                  </a:tcPr>
+                </a:tc>
+                <a:tc>
+                  <a:txBody>
+                    <a:bodyPr/>
+                    <a:lstStyle/>
+                    <a:p>
+                      <a:pPr algn="l"/>
+                      <a:r>
+                        <a:rPr sz="1000" b="0">
+                          <a:solidFill>
+                            <a:srgbClr val="1D1B43"/>
+                          </a:solidFill>
+                          <a:latin typeface="Calibri"/>
+                        </a:rPr>
+                        <a:t>AMAZON LOGISTICA DO - CURITIBA / PR</a:t>
+                      </a:r>
+                    </a:p>
+                  </a:txBody>
+                  <a:tcPr>
+                    <a:solidFill>
+                      <a:srgbClr val="FFFFFF"/>
+                    </a:solidFill>
+                  </a:tcPr>
+                </a:tc>
+                <a:tc>
+                  <a:txBody>
+                    <a:bodyPr/>
+                    <a:lstStyle/>
+                    <a:p>
+                      <a:pPr algn="l"/>
+                      <a:r>
+                        <a:rPr sz="1000" b="0">
+                          <a:solidFill>
+                            <a:srgbClr val="1D1B43"/>
+                          </a:solidFill>
+                          <a:latin typeface="Calibri"/>
+                        </a:rPr>
+                        <a:t>1</a:t>
+                      </a:r>
+                    </a:p>
+                  </a:txBody>
+                  <a:tcPr>
+                    <a:solidFill>
+                      <a:srgbClr val="FFFFFF"/>
+                    </a:solidFill>
+                  </a:tcPr>
+                </a:tc>
+                <a:tc>
+                  <a:txBody>
+                    <a:bodyPr/>
+                    <a:lstStyle/>
+                    <a:p>
+                      <a:pPr algn="l"/>
+                      <a:r>
+                        <a:rPr sz="1000" b="0">
+                          <a:solidFill>
+                            <a:srgbClr val="1D1B43"/>
+                          </a:solidFill>
+                          <a:latin typeface="Calibri"/>
+                        </a:rPr>
+                        <a:t>1</a:t>
+                      </a:r>
+                    </a:p>
+                  </a:txBody>
+                  <a:tcPr>
+                    <a:solidFill>
+                      <a:srgbClr val="FFFFFF"/>
+                    </a:solidFill>
+                  </a:tcPr>
+                </a:tc>
+                <a:tc>
+                  <a:txBody>
+                    <a:bodyPr/>
+                    <a:lstStyle/>
+                    <a:p>
+                      <a:pPr algn="l"/>
+                      <a:r>
+                        <a:rPr sz="1000" b="0">
+                          <a:solidFill>
+                            <a:srgbClr val="1D1B43"/>
+                          </a:solidFill>
+                          <a:latin typeface="Calibri"/>
+                        </a:rPr>
+                        <a:t>0</a:t>
+                      </a:r>
+                    </a:p>
+                  </a:txBody>
+                  <a:tcPr>
+                    <a:solidFill>
+                      <a:srgbClr val="FFFFFF"/>
+                    </a:solidFill>
+                  </a:tcPr>
+                </a:tc>
+                <a:tc>
+                  <a:txBody>
+                    <a:bodyPr/>
+                    <a:lstStyle/>
+                    <a:p>
+                      <a:pPr algn="l"/>
+                      <a:r>
+                        <a:rPr sz="1000" b="0">
+                          <a:solidFill>
+                            <a:srgbClr val="1D1B43"/>
+                          </a:solidFill>
+                          <a:latin typeface="Calibri"/>
+                        </a:rPr>
+                        <a:t>100.0%</a:t>
+                      </a:r>
+                    </a:p>
+                  </a:txBody>
+                  <a:tcPr>
+                    <a:solidFill>
+                      <a:srgbClr val="FFFFFF"/>
+                    </a:solidFill>
+                  </a:tcPr>
+                </a:tc>
+                <a:tc>
+                  <a:txBody>
+                    <a:bodyPr/>
+                    <a:lstStyle/>
+                    <a:p>
+                      <a:pPr algn="l"/>
+                      <a:r>
+                        <a:rPr sz="1000" b="0">
+                          <a:solidFill>
+                            <a:srgbClr val="1D1B43"/>
+                          </a:solidFill>
+                          <a:latin typeface="Calibri"/>
+                        </a:rPr>
                         <a:t>Excelente</a:t>
                       </a:r>
                     </a:p>
                   </a:txBody>
                   <a:tcPr>
                     <a:solidFill>
+                      <a:srgbClr val="FFFFFF"/>
+                    </a:solidFill>
+                  </a:tcPr>
+                </a:tc>
+              </a:tr>
+              <a:tr h="292608">
+                <a:tc>
+                  <a:txBody>
+                    <a:bodyPr/>
+                    <a:lstStyle/>
+                    <a:p>
+                      <a:pPr algn="l"/>
+                      <a:r>
+                        <a:rPr sz="1000" b="0">
+                          <a:solidFill>
+                            <a:srgbClr val="1D1B43"/>
+                          </a:solidFill>
+                          <a:latin typeface="Calibri"/>
+                        </a:rPr>
+                        <a:t>12</a:t>
+                      </a:r>
+                    </a:p>
+                  </a:txBody>
+                  <a:tcPr>
+                    <a:solidFill>
                       <a:srgbClr val="F2F2F2"/>
                     </a:solidFill>
                   </a:tcPr>
                 </a:tc>
+                <a:tc>
+                  <a:txBody>
+                    <a:bodyPr/>
+                    <a:lstStyle/>
+                    <a:p>
+                      <a:pPr algn="l"/>
+                      <a:r>
+                        <a:rPr sz="1000" b="0">
+                          <a:solidFill>
+                            <a:srgbClr val="1D1B43"/>
+                          </a:solidFill>
+                          <a:latin typeface="Calibri"/>
+                        </a:rPr>
+                        <a:t>AMAZON LOGISTICA DO - CANOAS / RS</a:t>
+                      </a:r>
+                    </a:p>
+                  </a:txBody>
+                  <a:tcPr>
+                    <a:solidFill>
+                      <a:srgbClr val="F2F2F2"/>
+                    </a:solidFill>
+                  </a:tcPr>
+                </a:tc>
+                <a:tc>
+                  <a:txBody>
+                    <a:bodyPr/>
+                    <a:lstStyle/>
+                    <a:p>
+                      <a:pPr algn="l"/>
+                      <a:r>
+                        <a:rPr sz="1000" b="0">
+                          <a:solidFill>
+                            <a:srgbClr val="1D1B43"/>
+                          </a:solidFill>
+                          <a:latin typeface="Calibri"/>
+                        </a:rPr>
+                        <a:t>1</a:t>
+                      </a:r>
+                    </a:p>
+                  </a:txBody>
+                  <a:tcPr>
+                    <a:solidFill>
+                      <a:srgbClr val="F2F2F2"/>
+                    </a:solidFill>
+                  </a:tcPr>
+                </a:tc>
+                <a:tc>
+                  <a:txBody>
+                    <a:bodyPr/>
+                    <a:lstStyle/>
+                    <a:p>
+                      <a:pPr algn="l"/>
+                      <a:r>
+                        <a:rPr sz="1000" b="0">
+                          <a:solidFill>
+                            <a:srgbClr val="1D1B43"/>
+                          </a:solidFill>
+                          <a:latin typeface="Calibri"/>
+                        </a:rPr>
+                        <a:t>1</a:t>
+                      </a:r>
+                    </a:p>
+                  </a:txBody>
+                  <a:tcPr>
+                    <a:solidFill>
+                      <a:srgbClr val="F2F2F2"/>
+                    </a:solidFill>
+                  </a:tcPr>
+                </a:tc>
+                <a:tc>
+                  <a:txBody>
+                    <a:bodyPr/>
+                    <a:lstStyle/>
+                    <a:p>
+                      <a:pPr algn="l"/>
+                      <a:r>
+                        <a:rPr sz="1000" b="0">
+                          <a:solidFill>
+                            <a:srgbClr val="1D1B43"/>
+                          </a:solidFill>
+                          <a:latin typeface="Calibri"/>
+                        </a:rPr>
+                        <a:t>0</a:t>
+                      </a:r>
+                    </a:p>
+                  </a:txBody>
+                  <a:tcPr>
+                    <a:solidFill>
+                      <a:srgbClr val="F2F2F2"/>
+                    </a:solidFill>
+                  </a:tcPr>
+                </a:tc>
+                <a:tc>
+                  <a:txBody>
+                    <a:bodyPr/>
+                    <a:lstStyle/>
+                    <a:p>
+                      <a:pPr algn="l"/>
+                      <a:r>
+                        <a:rPr sz="1000" b="0">
+                          <a:solidFill>
+                            <a:srgbClr val="1D1B43"/>
+                          </a:solidFill>
+                          <a:latin typeface="Calibri"/>
+                        </a:rPr>
+                        <a:t>100.0%</a:t>
+                      </a:r>
+                    </a:p>
+                  </a:txBody>
+                  <a:tcPr>
+                    <a:solidFill>
+                      <a:srgbClr val="F2F2F2"/>
+                    </a:solidFill>
+                  </a:tcPr>
+                </a:tc>
+                <a:tc>
+                  <a:txBody>
+                    <a:bodyPr/>
+                    <a:lstStyle/>
+                    <a:p>
+                      <a:pPr algn="l"/>
+                      <a:r>
+                        <a:rPr sz="1000" b="0">
+                          <a:solidFill>
+                            <a:srgbClr val="1D1B43"/>
+                          </a:solidFill>
+                          <a:latin typeface="Calibri"/>
+                        </a:rPr>
+                        <a:t>Excelente</a:t>
+                      </a:r>
+                    </a:p>
+                  </a:txBody>
+                  <a:tcPr>
+                    <a:solidFill>
+                      <a:srgbClr val="F2F2F2"/>
+                    </a:solidFill>
+                  </a:tcPr>
+                </a:tc>
               </a:tr>
-              <a:tr h="384048">
-                <a:tc>
-                  <a:txBody>
-                    <a:bodyPr/>
-                    <a:lstStyle/>
-                    <a:p>
-                      <a:pPr algn="l"/>
-                      <a:r>
-                        <a:rPr sz="1000" b="0">
-                          <a:solidFill>
-                            <a:srgbClr val="1D1B43"/>
-                          </a:solidFill>
-                          <a:latin typeface="Calibri"/>
-                        </a:rPr>
-                        <a:t>3</a:t>
+              <a:tr h="292608">
+                <a:tc>
+                  <a:txBody>
+                    <a:bodyPr/>
+                    <a:lstStyle/>
+                    <a:p>
+                      <a:pPr algn="l"/>
+                      <a:r>
+                        <a:rPr sz="1000" b="0">
+                          <a:solidFill>
+                            <a:srgbClr val="1D1B43"/>
+                          </a:solidFill>
+                          <a:latin typeface="Calibri"/>
+                        </a:rPr>
+                        <a:t>13</a:t>
                       </a:r>
                     </a:p>
                   </a:txBody>
@@ -6314,7 +9443,7 @@
                           </a:solidFill>
                           <a:latin typeface="Calibri"/>
                         </a:rPr>
-                        <a:t>AMAZON SERVICOS DE V - CAJAMAR / SP</a:t>
+                        <a:t>AMAZON LOGISTICA DO - SALVADOR / BA</a:t>
                       </a:r>
                     </a:p>
                   </a:txBody>
@@ -6440,21 +9569,21 @@
                   </a:tcPr>
                 </a:tc>
               </a:tr>
-              <a:tr h="384048">
-                <a:tc>
-                  <a:txBody>
-                    <a:bodyPr/>
-                    <a:lstStyle/>
-                    <a:p>
-                      <a:pPr algn="l"/>
-                      <a:r>
-                        <a:rPr sz="1000" b="0">
-                          <a:solidFill>
-                            <a:srgbClr val="1D1B43"/>
-                          </a:solidFill>
-                          <a:latin typeface="Calibri"/>
-                        </a:rPr>
-                        <a:t>4</a:t>
+              <a:tr h="292608">
+                <a:tc>
+                  <a:txBody>
+                    <a:bodyPr/>
+                    <a:lstStyle/>
+                    <a:p>
+                      <a:pPr algn="l"/>
+                      <a:r>
+                        <a:rPr sz="1000" b="0">
+                          <a:solidFill>
+                            <a:srgbClr val="1D1B43"/>
+                          </a:solidFill>
+                          <a:latin typeface="Calibri"/>
+                        </a:rPr>
+                        <a:t>14</a:t>
                       </a:r>
                     </a:p>
                   </a:txBody>
@@ -6477,659 +9606,7 @@
                           </a:solidFill>
                           <a:latin typeface="Calibri"/>
                         </a:rPr>
-                        <a:t>CAIO RODRIGUES DA CU - SAO PAULO / SP</a:t>
-                      </a:r>
-                    </a:p>
-                  </a:txBody>
-                  <a:tcPr>
-                    <a:solidFill>
-                      <a:srgbClr val="F2F2F2"/>
-                    </a:solidFill>
-                  </a:tcPr>
-                </a:tc>
-                <a:tc>
-                  <a:txBody>
-                    <a:bodyPr/>
-                    <a:lstStyle/>
-                    <a:p>
-                      <a:pPr algn="l"/>
-                      <a:r>
-                        <a:rPr sz="1000" b="0">
-                          <a:solidFill>
-                            <a:srgbClr val="1D1B43"/>
-                          </a:solidFill>
-                          <a:latin typeface="Calibri"/>
-                        </a:rPr>
-                        <a:t>1</a:t>
-                      </a:r>
-                    </a:p>
-                  </a:txBody>
-                  <a:tcPr>
-                    <a:solidFill>
-                      <a:srgbClr val="F2F2F2"/>
-                    </a:solidFill>
-                  </a:tcPr>
-                </a:tc>
-                <a:tc>
-                  <a:txBody>
-                    <a:bodyPr/>
-                    <a:lstStyle/>
-                    <a:p>
-                      <a:pPr algn="l"/>
-                      <a:r>
-                        <a:rPr sz="1000" b="0">
-                          <a:solidFill>
-                            <a:srgbClr val="1D1B43"/>
-                          </a:solidFill>
-                          <a:latin typeface="Calibri"/>
-                        </a:rPr>
-                        <a:t>1</a:t>
-                      </a:r>
-                    </a:p>
-                  </a:txBody>
-                  <a:tcPr>
-                    <a:solidFill>
-                      <a:srgbClr val="F2F2F2"/>
-                    </a:solidFill>
-                  </a:tcPr>
-                </a:tc>
-                <a:tc>
-                  <a:txBody>
-                    <a:bodyPr/>
-                    <a:lstStyle/>
-                    <a:p>
-                      <a:pPr algn="l"/>
-                      <a:r>
-                        <a:rPr sz="1000" b="0">
-                          <a:solidFill>
-                            <a:srgbClr val="1D1B43"/>
-                          </a:solidFill>
-                          <a:latin typeface="Calibri"/>
-                        </a:rPr>
-                        <a:t>0</a:t>
-                      </a:r>
-                    </a:p>
-                  </a:txBody>
-                  <a:tcPr>
-                    <a:solidFill>
-                      <a:srgbClr val="F2F2F2"/>
-                    </a:solidFill>
-                  </a:tcPr>
-                </a:tc>
-                <a:tc>
-                  <a:txBody>
-                    <a:bodyPr/>
-                    <a:lstStyle/>
-                    <a:p>
-                      <a:pPr algn="l"/>
-                      <a:r>
-                        <a:rPr sz="1000" b="0">
-                          <a:solidFill>
-                            <a:srgbClr val="1D1B43"/>
-                          </a:solidFill>
-                          <a:latin typeface="Calibri"/>
-                        </a:rPr>
-                        <a:t>100.0%</a:t>
-                      </a:r>
-                    </a:p>
-                  </a:txBody>
-                  <a:tcPr>
-                    <a:solidFill>
-                      <a:srgbClr val="F2F2F2"/>
-                    </a:solidFill>
-                  </a:tcPr>
-                </a:tc>
-                <a:tc>
-                  <a:txBody>
-                    <a:bodyPr/>
-                    <a:lstStyle/>
-                    <a:p>
-                      <a:pPr algn="l"/>
-                      <a:r>
-                        <a:rPr sz="1000" b="0">
-                          <a:solidFill>
-                            <a:srgbClr val="1D1B43"/>
-                          </a:solidFill>
-                          <a:latin typeface="Calibri"/>
-                        </a:rPr>
-                        <a:t>Excelente</a:t>
-                      </a:r>
-                    </a:p>
-                  </a:txBody>
-                  <a:tcPr>
-                    <a:solidFill>
-                      <a:srgbClr val="F2F2F2"/>
-                    </a:solidFill>
-                  </a:tcPr>
-                </a:tc>
-              </a:tr>
-              <a:tr h="384048">
-                <a:tc>
-                  <a:txBody>
-                    <a:bodyPr/>
-                    <a:lstStyle/>
-                    <a:p>
-                      <a:pPr algn="l"/>
-                      <a:r>
-                        <a:rPr sz="1000" b="0">
-                          <a:solidFill>
-                            <a:srgbClr val="1D1B43"/>
-                          </a:solidFill>
-                          <a:latin typeface="Calibri"/>
-                        </a:rPr>
-                        <a:t>5</a:t>
-                      </a:r>
-                    </a:p>
-                  </a:txBody>
-                  <a:tcPr>
-                    <a:solidFill>
-                      <a:srgbClr val="FFFFFF"/>
-                    </a:solidFill>
-                  </a:tcPr>
-                </a:tc>
-                <a:tc>
-                  <a:txBody>
-                    <a:bodyPr/>
-                    <a:lstStyle/>
-                    <a:p>
-                      <a:pPr algn="l"/>
-                      <a:r>
-                        <a:rPr sz="1000" b="0">
-                          <a:solidFill>
-                            <a:srgbClr val="1D1B43"/>
-                          </a:solidFill>
-                          <a:latin typeface="Calibri"/>
-                        </a:rPr>
-                        <a:t>EBAZAR.COM.BR. LTDA - CAJAMAR / SP</a:t>
-                      </a:r>
-                    </a:p>
-                  </a:txBody>
-                  <a:tcPr>
-                    <a:solidFill>
-                      <a:srgbClr val="FFFFFF"/>
-                    </a:solidFill>
-                  </a:tcPr>
-                </a:tc>
-                <a:tc>
-                  <a:txBody>
-                    <a:bodyPr/>
-                    <a:lstStyle/>
-                    <a:p>
-                      <a:pPr algn="l"/>
-                      <a:r>
-                        <a:rPr sz="1000" b="0">
-                          <a:solidFill>
-                            <a:srgbClr val="1D1B43"/>
-                          </a:solidFill>
-                          <a:latin typeface="Calibri"/>
-                        </a:rPr>
-                        <a:t>1</a:t>
-                      </a:r>
-                    </a:p>
-                  </a:txBody>
-                  <a:tcPr>
-                    <a:solidFill>
-                      <a:srgbClr val="FFFFFF"/>
-                    </a:solidFill>
-                  </a:tcPr>
-                </a:tc>
-                <a:tc>
-                  <a:txBody>
-                    <a:bodyPr/>
-                    <a:lstStyle/>
-                    <a:p>
-                      <a:pPr algn="l"/>
-                      <a:r>
-                        <a:rPr sz="1000" b="0">
-                          <a:solidFill>
-                            <a:srgbClr val="1D1B43"/>
-                          </a:solidFill>
-                          <a:latin typeface="Calibri"/>
-                        </a:rPr>
-                        <a:t>1</a:t>
-                      </a:r>
-                    </a:p>
-                  </a:txBody>
-                  <a:tcPr>
-                    <a:solidFill>
-                      <a:srgbClr val="FFFFFF"/>
-                    </a:solidFill>
-                  </a:tcPr>
-                </a:tc>
-                <a:tc>
-                  <a:txBody>
-                    <a:bodyPr/>
-                    <a:lstStyle/>
-                    <a:p>
-                      <a:pPr algn="l"/>
-                      <a:r>
-                        <a:rPr sz="1000" b="0">
-                          <a:solidFill>
-                            <a:srgbClr val="1D1B43"/>
-                          </a:solidFill>
-                          <a:latin typeface="Calibri"/>
-                        </a:rPr>
-                        <a:t>0</a:t>
-                      </a:r>
-                    </a:p>
-                  </a:txBody>
-                  <a:tcPr>
-                    <a:solidFill>
-                      <a:srgbClr val="FFFFFF"/>
-                    </a:solidFill>
-                  </a:tcPr>
-                </a:tc>
-                <a:tc>
-                  <a:txBody>
-                    <a:bodyPr/>
-                    <a:lstStyle/>
-                    <a:p>
-                      <a:pPr algn="l"/>
-                      <a:r>
-                        <a:rPr sz="1000" b="0">
-                          <a:solidFill>
-                            <a:srgbClr val="1D1B43"/>
-                          </a:solidFill>
-                          <a:latin typeface="Calibri"/>
-                        </a:rPr>
-                        <a:t>100.0%</a:t>
-                      </a:r>
-                    </a:p>
-                  </a:txBody>
-                  <a:tcPr>
-                    <a:solidFill>
-                      <a:srgbClr val="FFFFFF"/>
-                    </a:solidFill>
-                  </a:tcPr>
-                </a:tc>
-                <a:tc>
-                  <a:txBody>
-                    <a:bodyPr/>
-                    <a:lstStyle/>
-                    <a:p>
-                      <a:pPr algn="l"/>
-                      <a:r>
-                        <a:rPr sz="1000" b="0">
-                          <a:solidFill>
-                            <a:srgbClr val="1D1B43"/>
-                          </a:solidFill>
-                          <a:latin typeface="Calibri"/>
-                        </a:rPr>
-                        <a:t>Excelente</a:t>
-                      </a:r>
-                    </a:p>
-                  </a:txBody>
-                  <a:tcPr>
-                    <a:solidFill>
-                      <a:srgbClr val="FFFFFF"/>
-                    </a:solidFill>
-                  </a:tcPr>
-                </a:tc>
-              </a:tr>
-              <a:tr h="384048">
-                <a:tc>
-                  <a:txBody>
-                    <a:bodyPr/>
-                    <a:lstStyle/>
-                    <a:p>
-                      <a:pPr algn="l"/>
-                      <a:r>
-                        <a:rPr sz="1000" b="0">
-                          <a:solidFill>
-                            <a:srgbClr val="1D1B43"/>
-                          </a:solidFill>
-                          <a:latin typeface="Calibri"/>
-                        </a:rPr>
-                        <a:t>6</a:t>
-                      </a:r>
-                    </a:p>
-                  </a:txBody>
-                  <a:tcPr>
-                    <a:solidFill>
-                      <a:srgbClr val="F2F2F2"/>
-                    </a:solidFill>
-                  </a:tcPr>
-                </a:tc>
-                <a:tc>
-                  <a:txBody>
-                    <a:bodyPr/>
-                    <a:lstStyle/>
-                    <a:p>
-                      <a:pPr algn="l"/>
-                      <a:r>
-                        <a:rPr sz="1000" b="0">
-                          <a:solidFill>
-                            <a:srgbClr val="1D1B43"/>
-                          </a:solidFill>
-                          <a:latin typeface="Calibri"/>
-                        </a:rPr>
-                        <a:t>MOUSTACHE BEAMS LTDA - OSASCO / SP</a:t>
-                      </a:r>
-                    </a:p>
-                  </a:txBody>
-                  <a:tcPr>
-                    <a:solidFill>
-                      <a:srgbClr val="F2F2F2"/>
-                    </a:solidFill>
-                  </a:tcPr>
-                </a:tc>
-                <a:tc>
-                  <a:txBody>
-                    <a:bodyPr/>
-                    <a:lstStyle/>
-                    <a:p>
-                      <a:pPr algn="l"/>
-                      <a:r>
-                        <a:rPr sz="1000" b="0">
-                          <a:solidFill>
-                            <a:srgbClr val="1D1B43"/>
-                          </a:solidFill>
-                          <a:latin typeface="Calibri"/>
-                        </a:rPr>
-                        <a:t>1</a:t>
-                      </a:r>
-                    </a:p>
-                  </a:txBody>
-                  <a:tcPr>
-                    <a:solidFill>
-                      <a:srgbClr val="F2F2F2"/>
-                    </a:solidFill>
-                  </a:tcPr>
-                </a:tc>
-                <a:tc>
-                  <a:txBody>
-                    <a:bodyPr/>
-                    <a:lstStyle/>
-                    <a:p>
-                      <a:pPr algn="l"/>
-                      <a:r>
-                        <a:rPr sz="1000" b="0">
-                          <a:solidFill>
-                            <a:srgbClr val="1D1B43"/>
-                          </a:solidFill>
-                          <a:latin typeface="Calibri"/>
-                        </a:rPr>
-                        <a:t>1</a:t>
-                      </a:r>
-                    </a:p>
-                  </a:txBody>
-                  <a:tcPr>
-                    <a:solidFill>
-                      <a:srgbClr val="F2F2F2"/>
-                    </a:solidFill>
-                  </a:tcPr>
-                </a:tc>
-                <a:tc>
-                  <a:txBody>
-                    <a:bodyPr/>
-                    <a:lstStyle/>
-                    <a:p>
-                      <a:pPr algn="l"/>
-                      <a:r>
-                        <a:rPr sz="1000" b="0">
-                          <a:solidFill>
-                            <a:srgbClr val="1D1B43"/>
-                          </a:solidFill>
-                          <a:latin typeface="Calibri"/>
-                        </a:rPr>
-                        <a:t>0</a:t>
-                      </a:r>
-                    </a:p>
-                  </a:txBody>
-                  <a:tcPr>
-                    <a:solidFill>
-                      <a:srgbClr val="F2F2F2"/>
-                    </a:solidFill>
-                  </a:tcPr>
-                </a:tc>
-                <a:tc>
-                  <a:txBody>
-                    <a:bodyPr/>
-                    <a:lstStyle/>
-                    <a:p>
-                      <a:pPr algn="l"/>
-                      <a:r>
-                        <a:rPr sz="1000" b="0">
-                          <a:solidFill>
-                            <a:srgbClr val="1D1B43"/>
-                          </a:solidFill>
-                          <a:latin typeface="Calibri"/>
-                        </a:rPr>
-                        <a:t>100.0%</a:t>
-                      </a:r>
-                    </a:p>
-                  </a:txBody>
-                  <a:tcPr>
-                    <a:solidFill>
-                      <a:srgbClr val="F2F2F2"/>
-                    </a:solidFill>
-                  </a:tcPr>
-                </a:tc>
-                <a:tc>
-                  <a:txBody>
-                    <a:bodyPr/>
-                    <a:lstStyle/>
-                    <a:p>
-                      <a:pPr algn="l"/>
-                      <a:r>
-                        <a:rPr sz="1000" b="0">
-                          <a:solidFill>
-                            <a:srgbClr val="1D1B43"/>
-                          </a:solidFill>
-                          <a:latin typeface="Calibri"/>
-                        </a:rPr>
-                        <a:t>Excelente</a:t>
-                      </a:r>
-                    </a:p>
-                  </a:txBody>
-                  <a:tcPr>
-                    <a:solidFill>
-                      <a:srgbClr val="F2F2F2"/>
-                    </a:solidFill>
-                  </a:tcPr>
-                </a:tc>
-              </a:tr>
-              <a:tr h="384048">
-                <a:tc>
-                  <a:txBody>
-                    <a:bodyPr/>
-                    <a:lstStyle/>
-                    <a:p>
-                      <a:pPr algn="l"/>
-                      <a:r>
-                        <a:rPr sz="1000" b="0">
-                          <a:solidFill>
-                            <a:srgbClr val="1D1B43"/>
-                          </a:solidFill>
-                          <a:latin typeface="Calibri"/>
-                        </a:rPr>
-                        <a:t>7</a:t>
-                      </a:r>
-                    </a:p>
-                  </a:txBody>
-                  <a:tcPr>
-                    <a:solidFill>
-                      <a:srgbClr val="FFFFFF"/>
-                    </a:solidFill>
-                  </a:tcPr>
-                </a:tc>
-                <a:tc>
-                  <a:txBody>
-                    <a:bodyPr/>
-                    <a:lstStyle/>
-                    <a:p>
-                      <a:pPr algn="l"/>
-                      <a:r>
-                        <a:rPr sz="1000" b="0">
-                          <a:solidFill>
-                            <a:srgbClr val="1D1B43"/>
-                          </a:solidFill>
-                          <a:latin typeface="Calibri"/>
-                        </a:rPr>
-                        <a:t>PROJETO EXIT INDUSTR - ITAQUAQUECETUBA / SP</a:t>
-                      </a:r>
-                    </a:p>
-                  </a:txBody>
-                  <a:tcPr>
-                    <a:solidFill>
-                      <a:srgbClr val="FFFFFF"/>
-                    </a:solidFill>
-                  </a:tcPr>
-                </a:tc>
-                <a:tc>
-                  <a:txBody>
-                    <a:bodyPr/>
-                    <a:lstStyle/>
-                    <a:p>
-                      <a:pPr algn="l"/>
-                      <a:r>
-                        <a:rPr sz="1000" b="0">
-                          <a:solidFill>
-                            <a:srgbClr val="1D1B43"/>
-                          </a:solidFill>
-                          <a:latin typeface="Calibri"/>
-                        </a:rPr>
-                        <a:t>1</a:t>
-                      </a:r>
-                    </a:p>
-                  </a:txBody>
-                  <a:tcPr>
-                    <a:solidFill>
-                      <a:srgbClr val="FFFFFF"/>
-                    </a:solidFill>
-                  </a:tcPr>
-                </a:tc>
-                <a:tc>
-                  <a:txBody>
-                    <a:bodyPr/>
-                    <a:lstStyle/>
-                    <a:p>
-                      <a:pPr algn="l"/>
-                      <a:r>
-                        <a:rPr sz="1000" b="0">
-                          <a:solidFill>
-                            <a:srgbClr val="1D1B43"/>
-                          </a:solidFill>
-                          <a:latin typeface="Calibri"/>
-                        </a:rPr>
-                        <a:t>1</a:t>
-                      </a:r>
-                    </a:p>
-                  </a:txBody>
-                  <a:tcPr>
-                    <a:solidFill>
-                      <a:srgbClr val="FFFFFF"/>
-                    </a:solidFill>
-                  </a:tcPr>
-                </a:tc>
-                <a:tc>
-                  <a:txBody>
-                    <a:bodyPr/>
-                    <a:lstStyle/>
-                    <a:p>
-                      <a:pPr algn="l"/>
-                      <a:r>
-                        <a:rPr sz="1000" b="0">
-                          <a:solidFill>
-                            <a:srgbClr val="1D1B43"/>
-                          </a:solidFill>
-                          <a:latin typeface="Calibri"/>
-                        </a:rPr>
-                        <a:t>0</a:t>
-                      </a:r>
-                    </a:p>
-                  </a:txBody>
-                  <a:tcPr>
-                    <a:solidFill>
-                      <a:srgbClr val="FFFFFF"/>
-                    </a:solidFill>
-                  </a:tcPr>
-                </a:tc>
-                <a:tc>
-                  <a:txBody>
-                    <a:bodyPr/>
-                    <a:lstStyle/>
-                    <a:p>
-                      <a:pPr algn="l"/>
-                      <a:r>
-                        <a:rPr sz="1000" b="0">
-                          <a:solidFill>
-                            <a:srgbClr val="1D1B43"/>
-                          </a:solidFill>
-                          <a:latin typeface="Calibri"/>
-                        </a:rPr>
-                        <a:t>100.0%</a:t>
-                      </a:r>
-                    </a:p>
-                  </a:txBody>
-                  <a:tcPr>
-                    <a:solidFill>
-                      <a:srgbClr val="FFFFFF"/>
-                    </a:solidFill>
-                  </a:tcPr>
-                </a:tc>
-                <a:tc>
-                  <a:txBody>
-                    <a:bodyPr/>
-                    <a:lstStyle/>
-                    <a:p>
-                      <a:pPr algn="l"/>
-                      <a:r>
-                        <a:rPr sz="1000" b="0">
-                          <a:solidFill>
-                            <a:srgbClr val="1D1B43"/>
-                          </a:solidFill>
-                          <a:latin typeface="Calibri"/>
-                        </a:rPr>
-                        <a:t>Excelente</a:t>
-                      </a:r>
-                    </a:p>
-                  </a:txBody>
-                  <a:tcPr>
-                    <a:solidFill>
-                      <a:srgbClr val="FFFFFF"/>
-                    </a:solidFill>
-                  </a:tcPr>
-                </a:tc>
-              </a:tr>
-              <a:tr h="384048">
-                <a:tc>
-                  <a:txBody>
-                    <a:bodyPr/>
-                    <a:lstStyle/>
-                    <a:p>
-                      <a:pPr algn="l"/>
-                      <a:r>
-                        <a:rPr sz="1000" b="0">
-                          <a:solidFill>
-                            <a:srgbClr val="1D1B43"/>
-                          </a:solidFill>
-                          <a:latin typeface="Calibri"/>
-                        </a:rPr>
-                        <a:t>8</a:t>
-                      </a:r>
-                    </a:p>
-                  </a:txBody>
-                  <a:tcPr>
-                    <a:solidFill>
-                      <a:srgbClr val="F2F2F2"/>
-                    </a:solidFill>
-                  </a:tcPr>
-                </a:tc>
-                <a:tc>
-                  <a:txBody>
-                    <a:bodyPr/>
-                    <a:lstStyle/>
-                    <a:p>
-                      <a:pPr algn="l"/>
-                      <a:r>
-                        <a:rPr sz="1000" b="0">
-                          <a:solidFill>
-                            <a:srgbClr val="1D1B43"/>
-                          </a:solidFill>
-                          <a:latin typeface="Calibri"/>
-                        </a:rPr>
-                        <a:t>SOUL TRADE MARKETING - SAO PAULO / SP</a:t>
+                        <a:t>AMAZON LOGISTICA DO - VIANA / ES</a:t>
                       </a:r>
                     </a:p>
                   </a:txBody>
@@ -7267,7 +9744,7 @@
 </p:sld>
 </file>
 
-<file path=ppt/slides/slide6.xml><?xml version="1.0" encoding="utf-8"?>
+<file path=ppt/slides/slide7.xml><?xml version="1.0" encoding="utf-8"?>
 <p:sld xmlns:a="http://schemas.openxmlformats.org/drawingml/2006/main" xmlns:p="http://schemas.openxmlformats.org/presentationml/2006/main" xmlns:r="http://schemas.openxmlformats.org/officeDocument/2006/relationships">
   <p:cSld>
     <p:bg>
